--- a/AI BASED DROPOUT PREDICTION SYSTEM.pptx
+++ b/AI BASED DROPOUT PREDICTION SYSTEM.pptx
@@ -124,7 +124,18 @@
   </p:defaultTextStyle>
   <p:extLst>
     <p:ext uri="{EFAFB233-063F-42B5-8137-9DF3F51BA10A}">
-      <p15:sldGuideLst xmlns:p15="http://schemas.microsoft.com/office/powerpoint/2012/main" xmlns=""/>
+      <p15:sldGuideLst xmlns:p15="http://schemas.microsoft.com/office/powerpoint/2012/main">
+        <p15:guide id="1" orient="horz" pos="2160">
+          <p15:clr>
+            <a:srgbClr val="A4A3A4"/>
+          </p15:clr>
+        </p15:guide>
+        <p15:guide id="2" pos="3840">
+          <p15:clr>
+            <a:srgbClr val="A4A3A4"/>
+          </p15:clr>
+        </p15:guide>
+      </p15:sldGuideLst>
     </p:ext>
   </p:extLst>
 </p:presentation>
@@ -224,7 +235,7 @@
           <a:p>
             <a:fld id="{3F00BCFC-AFFD-334C-A183-6116BAFDF92B}" type="datetimeFigureOut">
               <a:rPr lang="en-US" smtClean="0"/>
-              <a:t>11/6/2025</a:t>
+              <a:t>8/20/2026</a:t>
             </a:fld>
             <a:endParaRPr lang="en-US" dirty="0"/>
           </a:p>
@@ -513,7 +524,7 @@
           <p:cNvPr id="4" name="Freeform 2">
             <a:extLst>
               <a:ext uri="{FF2B5EF4-FFF2-40B4-BE49-F238E27FC236}">
-                <a16:creationId xmlns:a16="http://schemas.microsoft.com/office/drawing/2014/main" xmlns="" id="{F51FEA09-E4BD-0741-D624-EED4A231C599}"/>
+                <a16:creationId xmlns:a16="http://schemas.microsoft.com/office/drawing/2014/main" id="{F51FEA09-E4BD-0741-D624-EED4A231C599}"/>
               </a:ext>
             </a:extLst>
           </p:cNvPr>
@@ -642,7 +653,7 @@
           <p:cNvPr id="17" name="Freeform 9">
             <a:extLst>
               <a:ext uri="{FF2B5EF4-FFF2-40B4-BE49-F238E27FC236}">
-                <a16:creationId xmlns:a16="http://schemas.microsoft.com/office/drawing/2014/main" xmlns="" id="{B707B5BA-AB15-D1EF-EBC5-F38FCE20FC52}"/>
+                <a16:creationId xmlns:a16="http://schemas.microsoft.com/office/drawing/2014/main" id="{B707B5BA-AB15-D1EF-EBC5-F38FCE20FC52}"/>
               </a:ext>
             </a:extLst>
           </p:cNvPr>
@@ -791,7 +802,7 @@
           <p:cNvPr id="6" name="Straight Connector 5">
             <a:extLst>
               <a:ext uri="{FF2B5EF4-FFF2-40B4-BE49-F238E27FC236}">
-                <a16:creationId xmlns:a16="http://schemas.microsoft.com/office/drawing/2014/main" xmlns="" id="{21AF73CC-B23B-6DCD-7E3E-8213485DF9B7}"/>
+                <a16:creationId xmlns:a16="http://schemas.microsoft.com/office/drawing/2014/main" id="{21AF73CC-B23B-6DCD-7E3E-8213485DF9B7}"/>
               </a:ext>
             </a:extLst>
           </p:cNvPr>
@@ -834,7 +845,7 @@
           <p:cNvPr id="7" name="Freeform 1">
             <a:extLst>
               <a:ext uri="{FF2B5EF4-FFF2-40B4-BE49-F238E27FC236}">
-                <a16:creationId xmlns:a16="http://schemas.microsoft.com/office/drawing/2014/main" xmlns="" id="{0319ECD0-7050-C18F-AC35-7F8DFA288A58}"/>
+                <a16:creationId xmlns:a16="http://schemas.microsoft.com/office/drawing/2014/main" id="{0319ECD0-7050-C18F-AC35-7F8DFA288A58}"/>
               </a:ext>
             </a:extLst>
           </p:cNvPr>
@@ -1176,7 +1187,7 @@
           <p:cNvPr id="8" name="Freeform 3">
             <a:extLst>
               <a:ext uri="{FF2B5EF4-FFF2-40B4-BE49-F238E27FC236}">
-                <a16:creationId xmlns:a16="http://schemas.microsoft.com/office/drawing/2014/main" xmlns="" id="{332954FC-1C1B-B277-413F-3CBA66FD1EAD}"/>
+                <a16:creationId xmlns:a16="http://schemas.microsoft.com/office/drawing/2014/main" id="{332954FC-1C1B-B277-413F-3CBA66FD1EAD}"/>
               </a:ext>
             </a:extLst>
           </p:cNvPr>
@@ -1519,7 +1530,7 @@
           <p:cNvPr id="9" name="Freeform 4">
             <a:extLst>
               <a:ext uri="{FF2B5EF4-FFF2-40B4-BE49-F238E27FC236}">
-                <a16:creationId xmlns:a16="http://schemas.microsoft.com/office/drawing/2014/main" xmlns="" id="{9AD65933-4DAE-2A46-C7F9-2A20CB244088}"/>
+                <a16:creationId xmlns:a16="http://schemas.microsoft.com/office/drawing/2014/main" id="{9AD65933-4DAE-2A46-C7F9-2A20CB244088}"/>
               </a:ext>
             </a:extLst>
           </p:cNvPr>
@@ -1649,7 +1660,7 @@
           <p:cNvPr id="18" name="Freeform 5">
             <a:extLst>
               <a:ext uri="{FF2B5EF4-FFF2-40B4-BE49-F238E27FC236}">
-                <a16:creationId xmlns:a16="http://schemas.microsoft.com/office/drawing/2014/main" xmlns="" id="{078C0FDD-401B-0E80-5823-215C99BAE6B2}"/>
+                <a16:creationId xmlns:a16="http://schemas.microsoft.com/office/drawing/2014/main" id="{078C0FDD-401B-0E80-5823-215C99BAE6B2}"/>
               </a:ext>
             </a:extLst>
           </p:cNvPr>
@@ -1793,7 +1804,7 @@
           <p:cNvPr id="2" name="Title 1">
             <a:extLst>
               <a:ext uri="{FF2B5EF4-FFF2-40B4-BE49-F238E27FC236}">
-                <a16:creationId xmlns:a16="http://schemas.microsoft.com/office/drawing/2014/main" xmlns="" id="{494248F2-5264-4601-AA0B-6C092F77F2DD}"/>
+                <a16:creationId xmlns:a16="http://schemas.microsoft.com/office/drawing/2014/main" id="{494248F2-5264-4601-AA0B-6C092F77F2DD}"/>
               </a:ext>
             </a:extLst>
           </p:cNvPr>
@@ -1833,7 +1844,7 @@
           <p:cNvPr id="3" name="Subtitle 2">
             <a:extLst>
               <a:ext uri="{FF2B5EF4-FFF2-40B4-BE49-F238E27FC236}">
-                <a16:creationId xmlns:a16="http://schemas.microsoft.com/office/drawing/2014/main" xmlns="" id="{DCFB69D3-5632-4285-A209-9DCA67DA668C}"/>
+                <a16:creationId xmlns:a16="http://schemas.microsoft.com/office/drawing/2014/main" id="{DCFB69D3-5632-4285-A209-9DCA67DA668C}"/>
               </a:ext>
             </a:extLst>
           </p:cNvPr>
@@ -1936,7 +1947,7 @@
           <p:cNvPr id="20" name="Freeform: Shape 19">
             <a:extLst>
               <a:ext uri="{FF2B5EF4-FFF2-40B4-BE49-F238E27FC236}">
-                <a16:creationId xmlns:a16="http://schemas.microsoft.com/office/drawing/2014/main" xmlns="" id="{C4226C42-B02E-1D4B-77B4-BF0257C6041E}"/>
+                <a16:creationId xmlns:a16="http://schemas.microsoft.com/office/drawing/2014/main" id="{C4226C42-B02E-1D4B-77B4-BF0257C6041E}"/>
               </a:ext>
             </a:extLst>
           </p:cNvPr>
@@ -2101,7 +2112,7 @@
           <p:cNvPr id="18" name="Freeform: Shape 17">
             <a:extLst>
               <a:ext uri="{FF2B5EF4-FFF2-40B4-BE49-F238E27FC236}">
-                <a16:creationId xmlns:a16="http://schemas.microsoft.com/office/drawing/2014/main" xmlns="" id="{260C6EA0-9137-97A8-7C78-0FCD8675F1B0}"/>
+                <a16:creationId xmlns:a16="http://schemas.microsoft.com/office/drawing/2014/main" id="{260C6EA0-9137-97A8-7C78-0FCD8675F1B0}"/>
               </a:ext>
             </a:extLst>
           </p:cNvPr>
@@ -2239,7 +2250,7 @@
           <p:cNvPr id="14" name="Freeform 24">
             <a:extLst>
               <a:ext uri="{FF2B5EF4-FFF2-40B4-BE49-F238E27FC236}">
-                <a16:creationId xmlns:a16="http://schemas.microsoft.com/office/drawing/2014/main" xmlns="" id="{2698A246-2716-9361-4EDE-2498058A4C3A}"/>
+                <a16:creationId xmlns:a16="http://schemas.microsoft.com/office/drawing/2014/main" id="{2698A246-2716-9361-4EDE-2498058A4C3A}"/>
               </a:ext>
             </a:extLst>
           </p:cNvPr>
@@ -2367,7 +2378,7 @@
           <p:cNvPr id="23" name="Freeform: Shape 22">
             <a:extLst>
               <a:ext uri="{FF2B5EF4-FFF2-40B4-BE49-F238E27FC236}">
-                <a16:creationId xmlns:a16="http://schemas.microsoft.com/office/drawing/2014/main" xmlns="" id="{F9A7DD52-C2B0-2B91-92C0-905899BB578D}"/>
+                <a16:creationId xmlns:a16="http://schemas.microsoft.com/office/drawing/2014/main" id="{F9A7DD52-C2B0-2B91-92C0-905899BB578D}"/>
               </a:ext>
             </a:extLst>
           </p:cNvPr>
@@ -2505,7 +2516,7 @@
           <p:cNvPr id="16" name="Freeform 29">
             <a:extLst>
               <a:ext uri="{FF2B5EF4-FFF2-40B4-BE49-F238E27FC236}">
-                <a16:creationId xmlns:a16="http://schemas.microsoft.com/office/drawing/2014/main" xmlns="" id="{73541AB3-4000-4259-4112-06DA0F0728A5}"/>
+                <a16:creationId xmlns:a16="http://schemas.microsoft.com/office/drawing/2014/main" id="{73541AB3-4000-4259-4112-06DA0F0728A5}"/>
               </a:ext>
             </a:extLst>
           </p:cNvPr>
@@ -2647,7 +2658,7 @@
           <p:cNvPr id="2" name="Title 1">
             <a:extLst>
               <a:ext uri="{FF2B5EF4-FFF2-40B4-BE49-F238E27FC236}">
-                <a16:creationId xmlns:a16="http://schemas.microsoft.com/office/drawing/2014/main" xmlns="" id="{5A0D1FF5-7EF8-4250-A259-43050ABBD3B6}"/>
+                <a16:creationId xmlns:a16="http://schemas.microsoft.com/office/drawing/2014/main" id="{5A0D1FF5-7EF8-4250-A259-43050ABBD3B6}"/>
               </a:ext>
             </a:extLst>
           </p:cNvPr>
@@ -2685,7 +2696,7 @@
           <p:cNvPr id="3" name="Text Placeholder 2">
             <a:extLst>
               <a:ext uri="{FF2B5EF4-FFF2-40B4-BE49-F238E27FC236}">
-                <a16:creationId xmlns:a16="http://schemas.microsoft.com/office/drawing/2014/main" xmlns="" id="{673DC3A9-D4E6-42CF-91A8-F267C7C66CCB}"/>
+                <a16:creationId xmlns:a16="http://schemas.microsoft.com/office/drawing/2014/main" id="{673DC3A9-D4E6-42CF-91A8-F267C7C66CCB}"/>
               </a:ext>
             </a:extLst>
           </p:cNvPr>
@@ -2758,7 +2769,7 @@
           <p:cNvPr id="4" name="Content Placeholder 3">
             <a:extLst>
               <a:ext uri="{FF2B5EF4-FFF2-40B4-BE49-F238E27FC236}">
-                <a16:creationId xmlns:a16="http://schemas.microsoft.com/office/drawing/2014/main" xmlns="" id="{C752CCA9-53A3-4DA5-AD45-C2A2C12A3A6A}"/>
+                <a16:creationId xmlns:a16="http://schemas.microsoft.com/office/drawing/2014/main" id="{C752CCA9-53A3-4DA5-AD45-C2A2C12A3A6A}"/>
               </a:ext>
             </a:extLst>
           </p:cNvPr>
@@ -2837,7 +2848,7 @@
           <p:cNvPr id="5" name="Text Placeholder 4">
             <a:extLst>
               <a:ext uri="{FF2B5EF4-FFF2-40B4-BE49-F238E27FC236}">
-                <a16:creationId xmlns:a16="http://schemas.microsoft.com/office/drawing/2014/main" xmlns="" id="{2100C9C6-BD61-4D2C-9146-FB785BAE4FF3}"/>
+                <a16:creationId xmlns:a16="http://schemas.microsoft.com/office/drawing/2014/main" id="{2100C9C6-BD61-4D2C-9146-FB785BAE4FF3}"/>
               </a:ext>
             </a:extLst>
           </p:cNvPr>
@@ -2910,7 +2921,7 @@
           <p:cNvPr id="6" name="Content Placeholder 5">
             <a:extLst>
               <a:ext uri="{FF2B5EF4-FFF2-40B4-BE49-F238E27FC236}">
-                <a16:creationId xmlns:a16="http://schemas.microsoft.com/office/drawing/2014/main" xmlns="" id="{E2E342EE-68BB-484D-98C3-48A7847549D4}"/>
+                <a16:creationId xmlns:a16="http://schemas.microsoft.com/office/drawing/2014/main" id="{E2E342EE-68BB-484D-98C3-48A7847549D4}"/>
               </a:ext>
             </a:extLst>
           </p:cNvPr>
@@ -2989,7 +3000,7 @@
           <p:cNvPr id="9" name="Slide Number Placeholder 8">
             <a:extLst>
               <a:ext uri="{FF2B5EF4-FFF2-40B4-BE49-F238E27FC236}">
-                <a16:creationId xmlns:a16="http://schemas.microsoft.com/office/drawing/2014/main" xmlns="" id="{285D9D7D-8D9A-473E-AF0D-EF1940D793C3}"/>
+                <a16:creationId xmlns:a16="http://schemas.microsoft.com/office/drawing/2014/main" id="{285D9D7D-8D9A-473E-AF0D-EF1940D793C3}"/>
               </a:ext>
             </a:extLst>
           </p:cNvPr>
@@ -3018,7 +3029,7 @@
           <p:cNvPr id="8" name="Footer Placeholder 7">
             <a:extLst>
               <a:ext uri="{FF2B5EF4-FFF2-40B4-BE49-F238E27FC236}">
-                <a16:creationId xmlns:a16="http://schemas.microsoft.com/office/drawing/2014/main" xmlns="" id="{3A51CCCC-1589-401D-AE98-FC28716301EF}"/>
+                <a16:creationId xmlns:a16="http://schemas.microsoft.com/office/drawing/2014/main" id="{3A51CCCC-1589-401D-AE98-FC28716301EF}"/>
               </a:ext>
             </a:extLst>
           </p:cNvPr>
@@ -3047,7 +3058,7 @@
           <p:cNvPr id="21" name="Straight Connector 20">
             <a:extLst>
               <a:ext uri="{FF2B5EF4-FFF2-40B4-BE49-F238E27FC236}">
-                <a16:creationId xmlns:a16="http://schemas.microsoft.com/office/drawing/2014/main" xmlns="" id="{DC963910-7C6F-7474-84FF-C53D235027B8}"/>
+                <a16:creationId xmlns:a16="http://schemas.microsoft.com/office/drawing/2014/main" id="{DC963910-7C6F-7474-84FF-C53D235027B8}"/>
               </a:ext>
             </a:extLst>
           </p:cNvPr>
@@ -3090,7 +3101,7 @@
           <p:cNvPr id="24" name="Text Placeholder 4">
             <a:extLst>
               <a:ext uri="{FF2B5EF4-FFF2-40B4-BE49-F238E27FC236}">
-                <a16:creationId xmlns:a16="http://schemas.microsoft.com/office/drawing/2014/main" xmlns="" id="{43CEC7BC-C46D-D3AD-22D8-8737322B7E20}"/>
+                <a16:creationId xmlns:a16="http://schemas.microsoft.com/office/drawing/2014/main" id="{43CEC7BC-C46D-D3AD-22D8-8737322B7E20}"/>
               </a:ext>
             </a:extLst>
           </p:cNvPr>
@@ -3163,7 +3174,7 @@
           <p:cNvPr id="25" name="Content Placeholder 5">
             <a:extLst>
               <a:ext uri="{FF2B5EF4-FFF2-40B4-BE49-F238E27FC236}">
-                <a16:creationId xmlns:a16="http://schemas.microsoft.com/office/drawing/2014/main" xmlns="" id="{658FA801-D400-D7FB-6241-4A41BBAAA0D1}"/>
+                <a16:creationId xmlns:a16="http://schemas.microsoft.com/office/drawing/2014/main" id="{658FA801-D400-D7FB-6241-4A41BBAAA0D1}"/>
               </a:ext>
             </a:extLst>
           </p:cNvPr>
@@ -3272,7 +3283,7 @@
           <p:cNvPr id="2" name="Title 1">
             <a:extLst>
               <a:ext uri="{FF2B5EF4-FFF2-40B4-BE49-F238E27FC236}">
-                <a16:creationId xmlns:a16="http://schemas.microsoft.com/office/drawing/2014/main" xmlns="" id="{B4515CD9-7B09-FB25-0368-96365B9DD51C}"/>
+                <a16:creationId xmlns:a16="http://schemas.microsoft.com/office/drawing/2014/main" id="{B4515CD9-7B09-FB25-0368-96365B9DD51C}"/>
               </a:ext>
             </a:extLst>
           </p:cNvPr>
@@ -3310,7 +3321,7 @@
           <p:cNvPr id="3" name="Footer Placeholder 2">
             <a:extLst>
               <a:ext uri="{FF2B5EF4-FFF2-40B4-BE49-F238E27FC236}">
-                <a16:creationId xmlns:a16="http://schemas.microsoft.com/office/drawing/2014/main" xmlns="" id="{6DC6BE5A-F1AC-214F-638D-C6C21E51BFB2}"/>
+                <a16:creationId xmlns:a16="http://schemas.microsoft.com/office/drawing/2014/main" id="{6DC6BE5A-F1AC-214F-638D-C6C21E51BFB2}"/>
               </a:ext>
             </a:extLst>
           </p:cNvPr>
@@ -3339,7 +3350,7 @@
           <p:cNvPr id="4" name="Slide Number Placeholder 3">
             <a:extLst>
               <a:ext uri="{FF2B5EF4-FFF2-40B4-BE49-F238E27FC236}">
-                <a16:creationId xmlns:a16="http://schemas.microsoft.com/office/drawing/2014/main" xmlns="" id="{0AB127D4-BE09-1C43-0562-195F20C8A05C}"/>
+                <a16:creationId xmlns:a16="http://schemas.microsoft.com/office/drawing/2014/main" id="{0AB127D4-BE09-1C43-0562-195F20C8A05C}"/>
               </a:ext>
             </a:extLst>
           </p:cNvPr>
@@ -3369,7 +3380,7 @@
           <p:cNvPr id="5" name="Oval 4">
             <a:extLst>
               <a:ext uri="{FF2B5EF4-FFF2-40B4-BE49-F238E27FC236}">
-                <a16:creationId xmlns:a16="http://schemas.microsoft.com/office/drawing/2014/main" xmlns="" id="{31740CAD-6CDA-9014-8875-BCECEECE0522}"/>
+                <a16:creationId xmlns:a16="http://schemas.microsoft.com/office/drawing/2014/main" id="{31740CAD-6CDA-9014-8875-BCECEECE0522}"/>
               </a:ext>
             </a:extLst>
           </p:cNvPr>
@@ -3434,7 +3445,7 @@
           <p:cNvPr id="6" name="Oval 5">
             <a:extLst>
               <a:ext uri="{FF2B5EF4-FFF2-40B4-BE49-F238E27FC236}">
-                <a16:creationId xmlns:a16="http://schemas.microsoft.com/office/drawing/2014/main" xmlns="" id="{16E536D1-EF07-9062-CA32-986876ED933F}"/>
+                <a16:creationId xmlns:a16="http://schemas.microsoft.com/office/drawing/2014/main" id="{16E536D1-EF07-9062-CA32-986876ED933F}"/>
               </a:ext>
             </a:extLst>
           </p:cNvPr>
@@ -3499,7 +3510,7 @@
           <p:cNvPr id="7" name="Oval 6">
             <a:extLst>
               <a:ext uri="{FF2B5EF4-FFF2-40B4-BE49-F238E27FC236}">
-                <a16:creationId xmlns:a16="http://schemas.microsoft.com/office/drawing/2014/main" xmlns="" id="{5D09D35C-DD66-8B6A-98FE-003262BBE72D}"/>
+                <a16:creationId xmlns:a16="http://schemas.microsoft.com/office/drawing/2014/main" id="{5D09D35C-DD66-8B6A-98FE-003262BBE72D}"/>
               </a:ext>
             </a:extLst>
           </p:cNvPr>
@@ -3564,7 +3575,7 @@
           <p:cNvPr id="8" name="Oval 7">
             <a:extLst>
               <a:ext uri="{FF2B5EF4-FFF2-40B4-BE49-F238E27FC236}">
-                <a16:creationId xmlns:a16="http://schemas.microsoft.com/office/drawing/2014/main" xmlns="" id="{F0E263D2-96A8-9EB3-2175-1DB2FD5CB609}"/>
+                <a16:creationId xmlns:a16="http://schemas.microsoft.com/office/drawing/2014/main" id="{F0E263D2-96A8-9EB3-2175-1DB2FD5CB609}"/>
               </a:ext>
             </a:extLst>
           </p:cNvPr>
@@ -3628,7 +3639,7 @@
           <p:cNvPr id="12" name="Text Placeholder 11">
             <a:extLst>
               <a:ext uri="{FF2B5EF4-FFF2-40B4-BE49-F238E27FC236}">
-                <a16:creationId xmlns:a16="http://schemas.microsoft.com/office/drawing/2014/main" xmlns="" id="{8B3517CD-F786-4206-2455-E4C3BD987425}"/>
+                <a16:creationId xmlns:a16="http://schemas.microsoft.com/office/drawing/2014/main" id="{8B3517CD-F786-4206-2455-E4C3BD987425}"/>
               </a:ext>
             </a:extLst>
           </p:cNvPr>
@@ -3675,7 +3686,7 @@
           <p:cNvPr id="13" name="Text Placeholder 11">
             <a:extLst>
               <a:ext uri="{FF2B5EF4-FFF2-40B4-BE49-F238E27FC236}">
-                <a16:creationId xmlns:a16="http://schemas.microsoft.com/office/drawing/2014/main" xmlns="" id="{9978C389-1D90-6CEB-1D34-D69BF78983F7}"/>
+                <a16:creationId xmlns:a16="http://schemas.microsoft.com/office/drawing/2014/main" id="{9978C389-1D90-6CEB-1D34-D69BF78983F7}"/>
               </a:ext>
             </a:extLst>
           </p:cNvPr>
@@ -3720,7 +3731,7 @@
           <p:cNvPr id="14" name="Text Placeholder 11">
             <a:extLst>
               <a:ext uri="{FF2B5EF4-FFF2-40B4-BE49-F238E27FC236}">
-                <a16:creationId xmlns:a16="http://schemas.microsoft.com/office/drawing/2014/main" xmlns="" id="{12B5D758-2B43-B448-79C9-1F09317F866C}"/>
+                <a16:creationId xmlns:a16="http://schemas.microsoft.com/office/drawing/2014/main" id="{12B5D758-2B43-B448-79C9-1F09317F866C}"/>
               </a:ext>
             </a:extLst>
           </p:cNvPr>
@@ -3767,7 +3778,7 @@
           <p:cNvPr id="15" name="Text Placeholder 11">
             <a:extLst>
               <a:ext uri="{FF2B5EF4-FFF2-40B4-BE49-F238E27FC236}">
-                <a16:creationId xmlns:a16="http://schemas.microsoft.com/office/drawing/2014/main" xmlns="" id="{65404FC1-F068-1D2B-A3D6-59F44099DD2D}"/>
+                <a16:creationId xmlns:a16="http://schemas.microsoft.com/office/drawing/2014/main" id="{65404FC1-F068-1D2B-A3D6-59F44099DD2D}"/>
               </a:ext>
             </a:extLst>
           </p:cNvPr>
@@ -3812,7 +3823,7 @@
           <p:cNvPr id="16" name="Text Placeholder 11">
             <a:extLst>
               <a:ext uri="{FF2B5EF4-FFF2-40B4-BE49-F238E27FC236}">
-                <a16:creationId xmlns:a16="http://schemas.microsoft.com/office/drawing/2014/main" xmlns="" id="{5F0B1C4A-F0AC-3974-6F79-9CCF799976B3}"/>
+                <a16:creationId xmlns:a16="http://schemas.microsoft.com/office/drawing/2014/main" id="{5F0B1C4A-F0AC-3974-6F79-9CCF799976B3}"/>
               </a:ext>
             </a:extLst>
           </p:cNvPr>
@@ -3859,7 +3870,7 @@
           <p:cNvPr id="17" name="Text Placeholder 11">
             <a:extLst>
               <a:ext uri="{FF2B5EF4-FFF2-40B4-BE49-F238E27FC236}">
-                <a16:creationId xmlns:a16="http://schemas.microsoft.com/office/drawing/2014/main" xmlns="" id="{5C12C91B-3BBC-019A-22DF-DF71A287D58E}"/>
+                <a16:creationId xmlns:a16="http://schemas.microsoft.com/office/drawing/2014/main" id="{5C12C91B-3BBC-019A-22DF-DF71A287D58E}"/>
               </a:ext>
             </a:extLst>
           </p:cNvPr>
@@ -3904,7 +3915,7 @@
           <p:cNvPr id="18" name="Text Placeholder 11">
             <a:extLst>
               <a:ext uri="{FF2B5EF4-FFF2-40B4-BE49-F238E27FC236}">
-                <a16:creationId xmlns:a16="http://schemas.microsoft.com/office/drawing/2014/main" xmlns="" id="{BB3FD4C7-50B9-E37D-A077-B15D8C6DB9A4}"/>
+                <a16:creationId xmlns:a16="http://schemas.microsoft.com/office/drawing/2014/main" id="{BB3FD4C7-50B9-E37D-A077-B15D8C6DB9A4}"/>
               </a:ext>
             </a:extLst>
           </p:cNvPr>
@@ -3951,7 +3962,7 @@
           <p:cNvPr id="19" name="Text Placeholder 11">
             <a:extLst>
               <a:ext uri="{FF2B5EF4-FFF2-40B4-BE49-F238E27FC236}">
-                <a16:creationId xmlns:a16="http://schemas.microsoft.com/office/drawing/2014/main" xmlns="" id="{486092F0-1D91-8C7F-EEFE-A7D79FF89C19}"/>
+                <a16:creationId xmlns:a16="http://schemas.microsoft.com/office/drawing/2014/main" id="{486092F0-1D91-8C7F-EEFE-A7D79FF89C19}"/>
               </a:ext>
             </a:extLst>
           </p:cNvPr>
@@ -3996,7 +4007,7 @@
           <p:cNvPr id="21" name="Picture Placeholder 20">
             <a:extLst>
               <a:ext uri="{FF2B5EF4-FFF2-40B4-BE49-F238E27FC236}">
-                <a16:creationId xmlns:a16="http://schemas.microsoft.com/office/drawing/2014/main" xmlns="" id="{8D38BBA9-DB40-81D9-4D13-4351576F9FD3}"/>
+                <a16:creationId xmlns:a16="http://schemas.microsoft.com/office/drawing/2014/main" id="{8D38BBA9-DB40-81D9-4D13-4351576F9FD3}"/>
               </a:ext>
             </a:extLst>
           </p:cNvPr>
@@ -4038,7 +4049,7 @@
           <p:cNvPr id="22" name="Picture Placeholder 20">
             <a:extLst>
               <a:ext uri="{FF2B5EF4-FFF2-40B4-BE49-F238E27FC236}">
-                <a16:creationId xmlns:a16="http://schemas.microsoft.com/office/drawing/2014/main" xmlns="" id="{D4E44748-5631-A2C7-ADA1-FB2707923EE2}"/>
+                <a16:creationId xmlns:a16="http://schemas.microsoft.com/office/drawing/2014/main" id="{D4E44748-5631-A2C7-ADA1-FB2707923EE2}"/>
               </a:ext>
             </a:extLst>
           </p:cNvPr>
@@ -4080,7 +4091,7 @@
           <p:cNvPr id="23" name="Picture Placeholder 20">
             <a:extLst>
               <a:ext uri="{FF2B5EF4-FFF2-40B4-BE49-F238E27FC236}">
-                <a16:creationId xmlns:a16="http://schemas.microsoft.com/office/drawing/2014/main" xmlns="" id="{8A56F66F-909F-8F64-B021-9820EB3F6B67}"/>
+                <a16:creationId xmlns:a16="http://schemas.microsoft.com/office/drawing/2014/main" id="{8A56F66F-909F-8F64-B021-9820EB3F6B67}"/>
               </a:ext>
             </a:extLst>
           </p:cNvPr>
@@ -4122,7 +4133,7 @@
           <p:cNvPr id="24" name="Picture Placeholder 20">
             <a:extLst>
               <a:ext uri="{FF2B5EF4-FFF2-40B4-BE49-F238E27FC236}">
-                <a16:creationId xmlns:a16="http://schemas.microsoft.com/office/drawing/2014/main" xmlns="" id="{EB90D275-5951-BAE0-8859-71B60C946087}"/>
+                <a16:creationId xmlns:a16="http://schemas.microsoft.com/office/drawing/2014/main" id="{EB90D275-5951-BAE0-8859-71B60C946087}"/>
               </a:ext>
             </a:extLst>
           </p:cNvPr>
@@ -4194,7 +4205,7 @@
           <p:cNvPr id="9" name="Oval 8">
             <a:extLst>
               <a:ext uri="{FF2B5EF4-FFF2-40B4-BE49-F238E27FC236}">
-                <a16:creationId xmlns:a16="http://schemas.microsoft.com/office/drawing/2014/main" xmlns="" id="{3CF1AC86-4E83-EED8-9FB5-635710111D45}"/>
+                <a16:creationId xmlns:a16="http://schemas.microsoft.com/office/drawing/2014/main" id="{3CF1AC86-4E83-EED8-9FB5-635710111D45}"/>
               </a:ext>
             </a:extLst>
           </p:cNvPr>
@@ -4259,7 +4270,7 @@
           <p:cNvPr id="10" name="Oval 9">
             <a:extLst>
               <a:ext uri="{FF2B5EF4-FFF2-40B4-BE49-F238E27FC236}">
-                <a16:creationId xmlns:a16="http://schemas.microsoft.com/office/drawing/2014/main" xmlns="" id="{803E890B-5D84-F4A6-E963-051A1C52577D}"/>
+                <a16:creationId xmlns:a16="http://schemas.microsoft.com/office/drawing/2014/main" id="{803E890B-5D84-F4A6-E963-051A1C52577D}"/>
               </a:ext>
             </a:extLst>
           </p:cNvPr>
@@ -4324,7 +4335,7 @@
           <p:cNvPr id="11" name="Oval 10">
             <a:extLst>
               <a:ext uri="{FF2B5EF4-FFF2-40B4-BE49-F238E27FC236}">
-                <a16:creationId xmlns:a16="http://schemas.microsoft.com/office/drawing/2014/main" xmlns="" id="{CA321B0B-6EF1-E460-8E13-3BBE774FA148}"/>
+                <a16:creationId xmlns:a16="http://schemas.microsoft.com/office/drawing/2014/main" id="{CA321B0B-6EF1-E460-8E13-3BBE774FA148}"/>
               </a:ext>
             </a:extLst>
           </p:cNvPr>
@@ -4389,7 +4400,7 @@
           <p:cNvPr id="20" name="Oval 19">
             <a:extLst>
               <a:ext uri="{FF2B5EF4-FFF2-40B4-BE49-F238E27FC236}">
-                <a16:creationId xmlns:a16="http://schemas.microsoft.com/office/drawing/2014/main" xmlns="" id="{898AB146-30D1-CD59-5D88-5097CF8561D1}"/>
+                <a16:creationId xmlns:a16="http://schemas.microsoft.com/office/drawing/2014/main" id="{898AB146-30D1-CD59-5D88-5097CF8561D1}"/>
               </a:ext>
             </a:extLst>
           </p:cNvPr>
@@ -4454,7 +4465,7 @@
           <p:cNvPr id="25" name="Oval 24">
             <a:extLst>
               <a:ext uri="{FF2B5EF4-FFF2-40B4-BE49-F238E27FC236}">
-                <a16:creationId xmlns:a16="http://schemas.microsoft.com/office/drawing/2014/main" xmlns="" id="{4FE52614-CC2D-3550-FDBA-9D7D76ED0F72}"/>
+                <a16:creationId xmlns:a16="http://schemas.microsoft.com/office/drawing/2014/main" id="{4FE52614-CC2D-3550-FDBA-9D7D76ED0F72}"/>
               </a:ext>
             </a:extLst>
           </p:cNvPr>
@@ -4519,7 +4530,7 @@
           <p:cNvPr id="26" name="Oval 25">
             <a:extLst>
               <a:ext uri="{FF2B5EF4-FFF2-40B4-BE49-F238E27FC236}">
-                <a16:creationId xmlns:a16="http://schemas.microsoft.com/office/drawing/2014/main" xmlns="" id="{D19BEA3C-B965-CC70-315C-7C531CD7AA4A}"/>
+                <a16:creationId xmlns:a16="http://schemas.microsoft.com/office/drawing/2014/main" id="{D19BEA3C-B965-CC70-315C-7C531CD7AA4A}"/>
               </a:ext>
             </a:extLst>
           </p:cNvPr>
@@ -4584,7 +4595,7 @@
           <p:cNvPr id="27" name="Oval 26">
             <a:extLst>
               <a:ext uri="{FF2B5EF4-FFF2-40B4-BE49-F238E27FC236}">
-                <a16:creationId xmlns:a16="http://schemas.microsoft.com/office/drawing/2014/main" xmlns="" id="{DBCCE6E9-C40E-A684-457C-F08C974BD59F}"/>
+                <a16:creationId xmlns:a16="http://schemas.microsoft.com/office/drawing/2014/main" id="{DBCCE6E9-C40E-A684-457C-F08C974BD59F}"/>
               </a:ext>
             </a:extLst>
           </p:cNvPr>
@@ -4649,7 +4660,7 @@
           <p:cNvPr id="28" name="Oval 27">
             <a:extLst>
               <a:ext uri="{FF2B5EF4-FFF2-40B4-BE49-F238E27FC236}">
-                <a16:creationId xmlns:a16="http://schemas.microsoft.com/office/drawing/2014/main" xmlns="" id="{E9B5F0D0-ABA3-5B0F-77C9-C5B64A613F84}"/>
+                <a16:creationId xmlns:a16="http://schemas.microsoft.com/office/drawing/2014/main" id="{E9B5F0D0-ABA3-5B0F-77C9-C5B64A613F84}"/>
               </a:ext>
             </a:extLst>
           </p:cNvPr>
@@ -4713,7 +4724,7 @@
           <p:cNvPr id="2" name="Title 1">
             <a:extLst>
               <a:ext uri="{FF2B5EF4-FFF2-40B4-BE49-F238E27FC236}">
-                <a16:creationId xmlns:a16="http://schemas.microsoft.com/office/drawing/2014/main" xmlns="" id="{B4515CD9-7B09-FB25-0368-96365B9DD51C}"/>
+                <a16:creationId xmlns:a16="http://schemas.microsoft.com/office/drawing/2014/main" id="{B4515CD9-7B09-FB25-0368-96365B9DD51C}"/>
               </a:ext>
             </a:extLst>
           </p:cNvPr>
@@ -4750,7 +4761,7 @@
           <p:cNvPr id="3" name="Footer Placeholder 2">
             <a:extLst>
               <a:ext uri="{FF2B5EF4-FFF2-40B4-BE49-F238E27FC236}">
-                <a16:creationId xmlns:a16="http://schemas.microsoft.com/office/drawing/2014/main" xmlns="" id="{6DC6BE5A-F1AC-214F-638D-C6C21E51BFB2}"/>
+                <a16:creationId xmlns:a16="http://schemas.microsoft.com/office/drawing/2014/main" id="{6DC6BE5A-F1AC-214F-638D-C6C21E51BFB2}"/>
               </a:ext>
             </a:extLst>
           </p:cNvPr>
@@ -4779,7 +4790,7 @@
           <p:cNvPr id="4" name="Slide Number Placeholder 3">
             <a:extLst>
               <a:ext uri="{FF2B5EF4-FFF2-40B4-BE49-F238E27FC236}">
-                <a16:creationId xmlns:a16="http://schemas.microsoft.com/office/drawing/2014/main" xmlns="" id="{0AB127D4-BE09-1C43-0562-195F20C8A05C}"/>
+                <a16:creationId xmlns:a16="http://schemas.microsoft.com/office/drawing/2014/main" id="{0AB127D4-BE09-1C43-0562-195F20C8A05C}"/>
               </a:ext>
             </a:extLst>
           </p:cNvPr>
@@ -4809,7 +4820,7 @@
           <p:cNvPr id="12" name="Text Placeholder 11">
             <a:extLst>
               <a:ext uri="{FF2B5EF4-FFF2-40B4-BE49-F238E27FC236}">
-                <a16:creationId xmlns:a16="http://schemas.microsoft.com/office/drawing/2014/main" xmlns="" id="{8B3517CD-F786-4206-2455-E4C3BD987425}"/>
+                <a16:creationId xmlns:a16="http://schemas.microsoft.com/office/drawing/2014/main" id="{8B3517CD-F786-4206-2455-E4C3BD987425}"/>
               </a:ext>
             </a:extLst>
           </p:cNvPr>
@@ -4856,7 +4867,7 @@
           <p:cNvPr id="13" name="Text Placeholder 11">
             <a:extLst>
               <a:ext uri="{FF2B5EF4-FFF2-40B4-BE49-F238E27FC236}">
-                <a16:creationId xmlns:a16="http://schemas.microsoft.com/office/drawing/2014/main" xmlns="" id="{9978C389-1D90-6CEB-1D34-D69BF78983F7}"/>
+                <a16:creationId xmlns:a16="http://schemas.microsoft.com/office/drawing/2014/main" id="{9978C389-1D90-6CEB-1D34-D69BF78983F7}"/>
               </a:ext>
             </a:extLst>
           </p:cNvPr>
@@ -4901,7 +4912,7 @@
           <p:cNvPr id="14" name="Text Placeholder 11">
             <a:extLst>
               <a:ext uri="{FF2B5EF4-FFF2-40B4-BE49-F238E27FC236}">
-                <a16:creationId xmlns:a16="http://schemas.microsoft.com/office/drawing/2014/main" xmlns="" id="{12B5D758-2B43-B448-79C9-1F09317F866C}"/>
+                <a16:creationId xmlns:a16="http://schemas.microsoft.com/office/drawing/2014/main" id="{12B5D758-2B43-B448-79C9-1F09317F866C}"/>
               </a:ext>
             </a:extLst>
           </p:cNvPr>
@@ -4948,7 +4959,7 @@
           <p:cNvPr id="15" name="Text Placeholder 11">
             <a:extLst>
               <a:ext uri="{FF2B5EF4-FFF2-40B4-BE49-F238E27FC236}">
-                <a16:creationId xmlns:a16="http://schemas.microsoft.com/office/drawing/2014/main" xmlns="" id="{65404FC1-F068-1D2B-A3D6-59F44099DD2D}"/>
+                <a16:creationId xmlns:a16="http://schemas.microsoft.com/office/drawing/2014/main" id="{65404FC1-F068-1D2B-A3D6-59F44099DD2D}"/>
               </a:ext>
             </a:extLst>
           </p:cNvPr>
@@ -4993,7 +5004,7 @@
           <p:cNvPr id="16" name="Text Placeholder 11">
             <a:extLst>
               <a:ext uri="{FF2B5EF4-FFF2-40B4-BE49-F238E27FC236}">
-                <a16:creationId xmlns:a16="http://schemas.microsoft.com/office/drawing/2014/main" xmlns="" id="{5F0B1C4A-F0AC-3974-6F79-9CCF799976B3}"/>
+                <a16:creationId xmlns:a16="http://schemas.microsoft.com/office/drawing/2014/main" id="{5F0B1C4A-F0AC-3974-6F79-9CCF799976B3}"/>
               </a:ext>
             </a:extLst>
           </p:cNvPr>
@@ -5040,7 +5051,7 @@
           <p:cNvPr id="17" name="Text Placeholder 11">
             <a:extLst>
               <a:ext uri="{FF2B5EF4-FFF2-40B4-BE49-F238E27FC236}">
-                <a16:creationId xmlns:a16="http://schemas.microsoft.com/office/drawing/2014/main" xmlns="" id="{5C12C91B-3BBC-019A-22DF-DF71A287D58E}"/>
+                <a16:creationId xmlns:a16="http://schemas.microsoft.com/office/drawing/2014/main" id="{5C12C91B-3BBC-019A-22DF-DF71A287D58E}"/>
               </a:ext>
             </a:extLst>
           </p:cNvPr>
@@ -5085,7 +5096,7 @@
           <p:cNvPr id="18" name="Text Placeholder 11">
             <a:extLst>
               <a:ext uri="{FF2B5EF4-FFF2-40B4-BE49-F238E27FC236}">
-                <a16:creationId xmlns:a16="http://schemas.microsoft.com/office/drawing/2014/main" xmlns="" id="{BB3FD4C7-50B9-E37D-A077-B15D8C6DB9A4}"/>
+                <a16:creationId xmlns:a16="http://schemas.microsoft.com/office/drawing/2014/main" id="{BB3FD4C7-50B9-E37D-A077-B15D8C6DB9A4}"/>
               </a:ext>
             </a:extLst>
           </p:cNvPr>
@@ -5132,7 +5143,7 @@
           <p:cNvPr id="19" name="Text Placeholder 11">
             <a:extLst>
               <a:ext uri="{FF2B5EF4-FFF2-40B4-BE49-F238E27FC236}">
-                <a16:creationId xmlns:a16="http://schemas.microsoft.com/office/drawing/2014/main" xmlns="" id="{486092F0-1D91-8C7F-EEFE-A7D79FF89C19}"/>
+                <a16:creationId xmlns:a16="http://schemas.microsoft.com/office/drawing/2014/main" id="{486092F0-1D91-8C7F-EEFE-A7D79FF89C19}"/>
               </a:ext>
             </a:extLst>
           </p:cNvPr>
@@ -5177,7 +5188,7 @@
           <p:cNvPr id="21" name="Picture Placeholder 20">
             <a:extLst>
               <a:ext uri="{FF2B5EF4-FFF2-40B4-BE49-F238E27FC236}">
-                <a16:creationId xmlns:a16="http://schemas.microsoft.com/office/drawing/2014/main" xmlns="" id="{8D38BBA9-DB40-81D9-4D13-4351576F9FD3}"/>
+                <a16:creationId xmlns:a16="http://schemas.microsoft.com/office/drawing/2014/main" id="{8D38BBA9-DB40-81D9-4D13-4351576F9FD3}"/>
               </a:ext>
             </a:extLst>
           </p:cNvPr>
@@ -5219,7 +5230,7 @@
           <p:cNvPr id="22" name="Picture Placeholder 20">
             <a:extLst>
               <a:ext uri="{FF2B5EF4-FFF2-40B4-BE49-F238E27FC236}">
-                <a16:creationId xmlns:a16="http://schemas.microsoft.com/office/drawing/2014/main" xmlns="" id="{D4E44748-5631-A2C7-ADA1-FB2707923EE2}"/>
+                <a16:creationId xmlns:a16="http://schemas.microsoft.com/office/drawing/2014/main" id="{D4E44748-5631-A2C7-ADA1-FB2707923EE2}"/>
               </a:ext>
             </a:extLst>
           </p:cNvPr>
@@ -5261,7 +5272,7 @@
           <p:cNvPr id="23" name="Picture Placeholder 20">
             <a:extLst>
               <a:ext uri="{FF2B5EF4-FFF2-40B4-BE49-F238E27FC236}">
-                <a16:creationId xmlns:a16="http://schemas.microsoft.com/office/drawing/2014/main" xmlns="" id="{8A56F66F-909F-8F64-B021-9820EB3F6B67}"/>
+                <a16:creationId xmlns:a16="http://schemas.microsoft.com/office/drawing/2014/main" id="{8A56F66F-909F-8F64-B021-9820EB3F6B67}"/>
               </a:ext>
             </a:extLst>
           </p:cNvPr>
@@ -5303,7 +5314,7 @@
           <p:cNvPr id="24" name="Picture Placeholder 20">
             <a:extLst>
               <a:ext uri="{FF2B5EF4-FFF2-40B4-BE49-F238E27FC236}">
-                <a16:creationId xmlns:a16="http://schemas.microsoft.com/office/drawing/2014/main" xmlns="" id="{EB90D275-5951-BAE0-8859-71B60C946087}"/>
+                <a16:creationId xmlns:a16="http://schemas.microsoft.com/office/drawing/2014/main" id="{EB90D275-5951-BAE0-8859-71B60C946087}"/>
               </a:ext>
             </a:extLst>
           </p:cNvPr>
@@ -5345,7 +5356,7 @@
           <p:cNvPr id="29" name="Picture Placeholder 20">
             <a:extLst>
               <a:ext uri="{FF2B5EF4-FFF2-40B4-BE49-F238E27FC236}">
-                <a16:creationId xmlns:a16="http://schemas.microsoft.com/office/drawing/2014/main" xmlns="" id="{BA9EB14D-8336-06B5-51E3-FBCAF00F1F25}"/>
+                <a16:creationId xmlns:a16="http://schemas.microsoft.com/office/drawing/2014/main" id="{BA9EB14D-8336-06B5-51E3-FBCAF00F1F25}"/>
               </a:ext>
             </a:extLst>
           </p:cNvPr>
@@ -5387,7 +5398,7 @@
           <p:cNvPr id="30" name="Picture Placeholder 20">
             <a:extLst>
               <a:ext uri="{FF2B5EF4-FFF2-40B4-BE49-F238E27FC236}">
-                <a16:creationId xmlns:a16="http://schemas.microsoft.com/office/drawing/2014/main" xmlns="" id="{A1E65D12-1094-78B5-B37A-A03576991D1D}"/>
+                <a16:creationId xmlns:a16="http://schemas.microsoft.com/office/drawing/2014/main" id="{A1E65D12-1094-78B5-B37A-A03576991D1D}"/>
               </a:ext>
             </a:extLst>
           </p:cNvPr>
@@ -5429,7 +5440,7 @@
           <p:cNvPr id="31" name="Picture Placeholder 20">
             <a:extLst>
               <a:ext uri="{FF2B5EF4-FFF2-40B4-BE49-F238E27FC236}">
-                <a16:creationId xmlns:a16="http://schemas.microsoft.com/office/drawing/2014/main" xmlns="" id="{6ABE5CEC-34A4-CD5D-FA0D-D675A87984F5}"/>
+                <a16:creationId xmlns:a16="http://schemas.microsoft.com/office/drawing/2014/main" id="{6ABE5CEC-34A4-CD5D-FA0D-D675A87984F5}"/>
               </a:ext>
             </a:extLst>
           </p:cNvPr>
@@ -5471,7 +5482,7 @@
           <p:cNvPr id="32" name="Picture Placeholder 20">
             <a:extLst>
               <a:ext uri="{FF2B5EF4-FFF2-40B4-BE49-F238E27FC236}">
-                <a16:creationId xmlns:a16="http://schemas.microsoft.com/office/drawing/2014/main" xmlns="" id="{5DA945B5-3444-7CAC-AA4A-55B04D039824}"/>
+                <a16:creationId xmlns:a16="http://schemas.microsoft.com/office/drawing/2014/main" id="{5DA945B5-3444-7CAC-AA4A-55B04D039824}"/>
               </a:ext>
             </a:extLst>
           </p:cNvPr>
@@ -5513,7 +5524,7 @@
           <p:cNvPr id="33" name="Text Placeholder 11">
             <a:extLst>
               <a:ext uri="{FF2B5EF4-FFF2-40B4-BE49-F238E27FC236}">
-                <a16:creationId xmlns:a16="http://schemas.microsoft.com/office/drawing/2014/main" xmlns="" id="{CB0DA5B5-9C84-7B23-EE8E-CEA555CD808E}"/>
+                <a16:creationId xmlns:a16="http://schemas.microsoft.com/office/drawing/2014/main" id="{CB0DA5B5-9C84-7B23-EE8E-CEA555CD808E}"/>
               </a:ext>
             </a:extLst>
           </p:cNvPr>
@@ -5560,7 +5571,7 @@
           <p:cNvPr id="34" name="Text Placeholder 11">
             <a:extLst>
               <a:ext uri="{FF2B5EF4-FFF2-40B4-BE49-F238E27FC236}">
-                <a16:creationId xmlns:a16="http://schemas.microsoft.com/office/drawing/2014/main" xmlns="" id="{99C62621-0080-5CDD-E5DD-2FCF2D548CEB}"/>
+                <a16:creationId xmlns:a16="http://schemas.microsoft.com/office/drawing/2014/main" id="{99C62621-0080-5CDD-E5DD-2FCF2D548CEB}"/>
               </a:ext>
             </a:extLst>
           </p:cNvPr>
@@ -5605,7 +5616,7 @@
           <p:cNvPr id="35" name="Text Placeholder 11">
             <a:extLst>
               <a:ext uri="{FF2B5EF4-FFF2-40B4-BE49-F238E27FC236}">
-                <a16:creationId xmlns:a16="http://schemas.microsoft.com/office/drawing/2014/main" xmlns="" id="{B69DDE47-632B-987E-545E-BAB200D374ED}"/>
+                <a16:creationId xmlns:a16="http://schemas.microsoft.com/office/drawing/2014/main" id="{B69DDE47-632B-987E-545E-BAB200D374ED}"/>
               </a:ext>
             </a:extLst>
           </p:cNvPr>
@@ -5652,7 +5663,7 @@
           <p:cNvPr id="36" name="Text Placeholder 11">
             <a:extLst>
               <a:ext uri="{FF2B5EF4-FFF2-40B4-BE49-F238E27FC236}">
-                <a16:creationId xmlns:a16="http://schemas.microsoft.com/office/drawing/2014/main" xmlns="" id="{A165DCBF-4EFD-7181-68BA-1625AC1C0D5F}"/>
+                <a16:creationId xmlns:a16="http://schemas.microsoft.com/office/drawing/2014/main" id="{A165DCBF-4EFD-7181-68BA-1625AC1C0D5F}"/>
               </a:ext>
             </a:extLst>
           </p:cNvPr>
@@ -5697,7 +5708,7 @@
           <p:cNvPr id="37" name="Text Placeholder 11">
             <a:extLst>
               <a:ext uri="{FF2B5EF4-FFF2-40B4-BE49-F238E27FC236}">
-                <a16:creationId xmlns:a16="http://schemas.microsoft.com/office/drawing/2014/main" xmlns="" id="{3C7ECA2F-9EC3-26BD-B424-ECE80473DF37}"/>
+                <a16:creationId xmlns:a16="http://schemas.microsoft.com/office/drawing/2014/main" id="{3C7ECA2F-9EC3-26BD-B424-ECE80473DF37}"/>
               </a:ext>
             </a:extLst>
           </p:cNvPr>
@@ -5744,7 +5755,7 @@
           <p:cNvPr id="38" name="Text Placeholder 11">
             <a:extLst>
               <a:ext uri="{FF2B5EF4-FFF2-40B4-BE49-F238E27FC236}">
-                <a16:creationId xmlns:a16="http://schemas.microsoft.com/office/drawing/2014/main" xmlns="" id="{C9535F99-6134-8D03-FFEE-D1B3E007F2CC}"/>
+                <a16:creationId xmlns:a16="http://schemas.microsoft.com/office/drawing/2014/main" id="{C9535F99-6134-8D03-FFEE-D1B3E007F2CC}"/>
               </a:ext>
             </a:extLst>
           </p:cNvPr>
@@ -5789,7 +5800,7 @@
           <p:cNvPr id="39" name="Text Placeholder 11">
             <a:extLst>
               <a:ext uri="{FF2B5EF4-FFF2-40B4-BE49-F238E27FC236}">
-                <a16:creationId xmlns:a16="http://schemas.microsoft.com/office/drawing/2014/main" xmlns="" id="{163BD863-99E7-C7C4-4762-8C168574E9A8}"/>
+                <a16:creationId xmlns:a16="http://schemas.microsoft.com/office/drawing/2014/main" id="{163BD863-99E7-C7C4-4762-8C168574E9A8}"/>
               </a:ext>
             </a:extLst>
           </p:cNvPr>
@@ -5836,7 +5847,7 @@
           <p:cNvPr id="40" name="Text Placeholder 11">
             <a:extLst>
               <a:ext uri="{FF2B5EF4-FFF2-40B4-BE49-F238E27FC236}">
-                <a16:creationId xmlns:a16="http://schemas.microsoft.com/office/drawing/2014/main" xmlns="" id="{63678AE5-B810-D5BE-40B5-888AF4473157}"/>
+                <a16:creationId xmlns:a16="http://schemas.microsoft.com/office/drawing/2014/main" id="{63678AE5-B810-D5BE-40B5-888AF4473157}"/>
               </a:ext>
             </a:extLst>
           </p:cNvPr>
@@ -5911,7 +5922,7 @@
           <p:cNvPr id="24" name="Freeform: Shape 23">
             <a:extLst>
               <a:ext uri="{FF2B5EF4-FFF2-40B4-BE49-F238E27FC236}">
-                <a16:creationId xmlns:a16="http://schemas.microsoft.com/office/drawing/2014/main" xmlns="" id="{FF4F2FF2-B2D0-EAB9-0059-1E59CFF27936}"/>
+                <a16:creationId xmlns:a16="http://schemas.microsoft.com/office/drawing/2014/main" id="{FF4F2FF2-B2D0-EAB9-0059-1E59CFF27936}"/>
               </a:ext>
             </a:extLst>
           </p:cNvPr>
@@ -6067,7 +6078,7 @@
           <p:cNvPr id="19" name="Freeform: Shape 18">
             <a:extLst>
               <a:ext uri="{FF2B5EF4-FFF2-40B4-BE49-F238E27FC236}">
-                <a16:creationId xmlns:a16="http://schemas.microsoft.com/office/drawing/2014/main" xmlns="" id="{8B193F7C-DAB3-79A0-9B6F-012F23BAF8BD}"/>
+                <a16:creationId xmlns:a16="http://schemas.microsoft.com/office/drawing/2014/main" id="{8B193F7C-DAB3-79A0-9B6F-012F23BAF8BD}"/>
               </a:ext>
             </a:extLst>
           </p:cNvPr>
@@ -6222,7 +6233,7 @@
           <p:cNvPr id="14" name="Freeform: Shape 13">
             <a:extLst>
               <a:ext uri="{FF2B5EF4-FFF2-40B4-BE49-F238E27FC236}">
-                <a16:creationId xmlns:a16="http://schemas.microsoft.com/office/drawing/2014/main" xmlns="" id="{D9D045F5-266F-9ADF-9692-2DA7DB16DFFE}"/>
+                <a16:creationId xmlns:a16="http://schemas.microsoft.com/office/drawing/2014/main" id="{D9D045F5-266F-9ADF-9692-2DA7DB16DFFE}"/>
               </a:ext>
             </a:extLst>
           </p:cNvPr>
@@ -6359,7 +6370,7 @@
           <p:cNvPr id="12" name="Freeform: Shape 11">
             <a:extLst>
               <a:ext uri="{FF2B5EF4-FFF2-40B4-BE49-F238E27FC236}">
-                <a16:creationId xmlns:a16="http://schemas.microsoft.com/office/drawing/2014/main" xmlns="" id="{2A494E50-F563-24E6-92E6-F9E55D1F3D50}"/>
+                <a16:creationId xmlns:a16="http://schemas.microsoft.com/office/drawing/2014/main" id="{2A494E50-F563-24E6-92E6-F9E55D1F3D50}"/>
               </a:ext>
             </a:extLst>
           </p:cNvPr>
@@ -6483,7 +6494,7 @@
           <p:cNvPr id="16" name="glass card">
             <a:extLst>
               <a:ext uri="{FF2B5EF4-FFF2-40B4-BE49-F238E27FC236}">
-                <a16:creationId xmlns:a16="http://schemas.microsoft.com/office/drawing/2014/main" xmlns="" id="{D9024B22-C102-71C1-8593-95259EC18972}"/>
+                <a16:creationId xmlns:a16="http://schemas.microsoft.com/office/drawing/2014/main" id="{D9024B22-C102-71C1-8593-95259EC18972}"/>
               </a:ext>
             </a:extLst>
           </p:cNvPr>
@@ -6592,7 +6603,7 @@
           <p:cNvPr id="2" name="Title 1">
             <a:extLst>
               <a:ext uri="{FF2B5EF4-FFF2-40B4-BE49-F238E27FC236}">
-                <a16:creationId xmlns:a16="http://schemas.microsoft.com/office/drawing/2014/main" xmlns="" id="{494248F2-5264-4601-AA0B-6C092F77F2DD}"/>
+                <a16:creationId xmlns:a16="http://schemas.microsoft.com/office/drawing/2014/main" id="{494248F2-5264-4601-AA0B-6C092F77F2DD}"/>
               </a:ext>
             </a:extLst>
           </p:cNvPr>
@@ -6632,7 +6643,7 @@
           <p:cNvPr id="3" name="Subtitle 2">
             <a:extLst>
               <a:ext uri="{FF2B5EF4-FFF2-40B4-BE49-F238E27FC236}">
-                <a16:creationId xmlns:a16="http://schemas.microsoft.com/office/drawing/2014/main" xmlns="" id="{DCFB69D3-5632-4285-A209-9DCA67DA668C}"/>
+                <a16:creationId xmlns:a16="http://schemas.microsoft.com/office/drawing/2014/main" id="{DCFB69D3-5632-4285-A209-9DCA67DA668C}"/>
               </a:ext>
             </a:extLst>
           </p:cNvPr>
@@ -6708,7 +6719,7 @@
           <p:cNvPr id="28" name="Straight Connector 27">
             <a:extLst>
               <a:ext uri="{FF2B5EF4-FFF2-40B4-BE49-F238E27FC236}">
-                <a16:creationId xmlns:a16="http://schemas.microsoft.com/office/drawing/2014/main" xmlns="" id="{93303B57-FF55-B795-FAE7-5EF26BFCBEF3}"/>
+                <a16:creationId xmlns:a16="http://schemas.microsoft.com/office/drawing/2014/main" id="{93303B57-FF55-B795-FAE7-5EF26BFCBEF3}"/>
               </a:ext>
             </a:extLst>
           </p:cNvPr>
@@ -6751,7 +6762,7 @@
           <p:cNvPr id="21" name="Freeform: Shape 20">
             <a:extLst>
               <a:ext uri="{FF2B5EF4-FFF2-40B4-BE49-F238E27FC236}">
-                <a16:creationId xmlns:a16="http://schemas.microsoft.com/office/drawing/2014/main" xmlns="" id="{8A78F28F-70CE-7FE2-ACE1-FA2D7C1CE590}"/>
+                <a16:creationId xmlns:a16="http://schemas.microsoft.com/office/drawing/2014/main" id="{8A78F28F-70CE-7FE2-ACE1-FA2D7C1CE590}"/>
               </a:ext>
             </a:extLst>
           </p:cNvPr>
@@ -6897,7 +6908,7 @@
           <p:cNvPr id="29" name="Freeform: Shape 28">
             <a:extLst>
               <a:ext uri="{FF2B5EF4-FFF2-40B4-BE49-F238E27FC236}">
-                <a16:creationId xmlns:a16="http://schemas.microsoft.com/office/drawing/2014/main" xmlns="" id="{294AB31D-FEF2-F3B0-D726-81CE48F895EA}"/>
+                <a16:creationId xmlns:a16="http://schemas.microsoft.com/office/drawing/2014/main" id="{294AB31D-FEF2-F3B0-D726-81CE48F895EA}"/>
               </a:ext>
             </a:extLst>
           </p:cNvPr>
@@ -7064,7 +7075,7 @@
           <p:cNvPr id="2" name="Title 1">
             <a:extLst>
               <a:ext uri="{FF2B5EF4-FFF2-40B4-BE49-F238E27FC236}">
-                <a16:creationId xmlns:a16="http://schemas.microsoft.com/office/drawing/2014/main" xmlns="" id="{A2DFA2E8-50A1-4465-AC33-6FAC0E7736E9}"/>
+                <a16:creationId xmlns:a16="http://schemas.microsoft.com/office/drawing/2014/main" id="{A2DFA2E8-50A1-4465-AC33-6FAC0E7736E9}"/>
               </a:ext>
             </a:extLst>
           </p:cNvPr>
@@ -7104,7 +7115,7 @@
           <p:cNvPr id="3" name="Text Placeholder 2">
             <a:extLst>
               <a:ext uri="{FF2B5EF4-FFF2-40B4-BE49-F238E27FC236}">
-                <a16:creationId xmlns:a16="http://schemas.microsoft.com/office/drawing/2014/main" xmlns="" id="{2E65DE34-CDB7-41F7-A95A-592B99558C69}"/>
+                <a16:creationId xmlns:a16="http://schemas.microsoft.com/office/drawing/2014/main" id="{2E65DE34-CDB7-41F7-A95A-592B99558C69}"/>
               </a:ext>
             </a:extLst>
           </p:cNvPr>
@@ -7227,7 +7238,7 @@
           <p:cNvPr id="7" name="Freeform 14">
             <a:extLst>
               <a:ext uri="{FF2B5EF4-FFF2-40B4-BE49-F238E27FC236}">
-                <a16:creationId xmlns:a16="http://schemas.microsoft.com/office/drawing/2014/main" xmlns="" id="{907BDD9A-3C2A-A21B-A425-1BB45BF5C103}"/>
+                <a16:creationId xmlns:a16="http://schemas.microsoft.com/office/drawing/2014/main" id="{907BDD9A-3C2A-A21B-A425-1BB45BF5C103}"/>
               </a:ext>
             </a:extLst>
           </p:cNvPr>
@@ -7372,7 +7383,7 @@
           <p:cNvPr id="8" name="Freeform 16">
             <a:extLst>
               <a:ext uri="{FF2B5EF4-FFF2-40B4-BE49-F238E27FC236}">
-                <a16:creationId xmlns:a16="http://schemas.microsoft.com/office/drawing/2014/main" xmlns="" id="{989D7F61-B47A-97D5-F725-EC5EFE81187A}"/>
+                <a16:creationId xmlns:a16="http://schemas.microsoft.com/office/drawing/2014/main" id="{989D7F61-B47A-97D5-F725-EC5EFE81187A}"/>
               </a:ext>
             </a:extLst>
           </p:cNvPr>
@@ -7521,7 +7532,7 @@
           <p:cNvPr id="9" name="Freeform 17">
             <a:extLst>
               <a:ext uri="{FF2B5EF4-FFF2-40B4-BE49-F238E27FC236}">
-                <a16:creationId xmlns:a16="http://schemas.microsoft.com/office/drawing/2014/main" xmlns="" id="{A70008D0-0FB3-5B8D-3060-6EDD9E247095}"/>
+                <a16:creationId xmlns:a16="http://schemas.microsoft.com/office/drawing/2014/main" id="{A70008D0-0FB3-5B8D-3060-6EDD9E247095}"/>
               </a:ext>
             </a:extLst>
           </p:cNvPr>
@@ -7715,7 +7726,7 @@
           <p:cNvPr id="10" name="Straight Connector 9">
             <a:extLst>
               <a:ext uri="{FF2B5EF4-FFF2-40B4-BE49-F238E27FC236}">
-                <a16:creationId xmlns:a16="http://schemas.microsoft.com/office/drawing/2014/main" xmlns="" id="{4CA6FFAC-0E5C-DA2F-C0F9-D5602F928AEC}"/>
+                <a16:creationId xmlns:a16="http://schemas.microsoft.com/office/drawing/2014/main" id="{4CA6FFAC-0E5C-DA2F-C0F9-D5602F928AEC}"/>
               </a:ext>
             </a:extLst>
           </p:cNvPr>
@@ -7788,7 +7799,7 @@
           <p:cNvPr id="2" name="Title 1">
             <a:extLst>
               <a:ext uri="{FF2B5EF4-FFF2-40B4-BE49-F238E27FC236}">
-                <a16:creationId xmlns:a16="http://schemas.microsoft.com/office/drawing/2014/main" xmlns="" id="{4B2F7D74-558F-4816-9367-4004FFA2B6A4}"/>
+                <a16:creationId xmlns:a16="http://schemas.microsoft.com/office/drawing/2014/main" id="{4B2F7D74-558F-4816-9367-4004FFA2B6A4}"/>
               </a:ext>
             </a:extLst>
           </p:cNvPr>
@@ -7823,7 +7834,7 @@
           <p:cNvPr id="3" name="Content Placeholder 2">
             <a:extLst>
               <a:ext uri="{FF2B5EF4-FFF2-40B4-BE49-F238E27FC236}">
-                <a16:creationId xmlns:a16="http://schemas.microsoft.com/office/drawing/2014/main" xmlns="" id="{56069ADF-8CD9-4E77-BB8D-70D8824C5AE3}"/>
+                <a16:creationId xmlns:a16="http://schemas.microsoft.com/office/drawing/2014/main" id="{56069ADF-8CD9-4E77-BB8D-70D8824C5AE3}"/>
               </a:ext>
             </a:extLst>
           </p:cNvPr>
@@ -7885,7 +7896,7 @@
           <p:cNvPr id="4" name="Content Placeholder 3">
             <a:extLst>
               <a:ext uri="{FF2B5EF4-FFF2-40B4-BE49-F238E27FC236}">
-                <a16:creationId xmlns:a16="http://schemas.microsoft.com/office/drawing/2014/main" xmlns="" id="{F75F077D-E901-4AA9-B062-1C37FF407BFD}"/>
+                <a16:creationId xmlns:a16="http://schemas.microsoft.com/office/drawing/2014/main" id="{F75F077D-E901-4AA9-B062-1C37FF407BFD}"/>
               </a:ext>
             </a:extLst>
           </p:cNvPr>
@@ -7947,7 +7958,7 @@
           <p:cNvPr id="6" name="Footer Placeholder 5">
             <a:extLst>
               <a:ext uri="{FF2B5EF4-FFF2-40B4-BE49-F238E27FC236}">
-                <a16:creationId xmlns:a16="http://schemas.microsoft.com/office/drawing/2014/main" xmlns="" id="{BE7B5E76-E101-4994-92F5-1F540EB16AB0}"/>
+                <a16:creationId xmlns:a16="http://schemas.microsoft.com/office/drawing/2014/main" id="{BE7B5E76-E101-4994-92F5-1F540EB16AB0}"/>
               </a:ext>
             </a:extLst>
           </p:cNvPr>
@@ -7976,7 +7987,7 @@
           <p:cNvPr id="7" name="Slide Number Placeholder 6">
             <a:extLst>
               <a:ext uri="{FF2B5EF4-FFF2-40B4-BE49-F238E27FC236}">
-                <a16:creationId xmlns:a16="http://schemas.microsoft.com/office/drawing/2014/main" xmlns="" id="{E249F242-2699-411D-B3F7-3D6D480E4955}"/>
+                <a16:creationId xmlns:a16="http://schemas.microsoft.com/office/drawing/2014/main" id="{E249F242-2699-411D-B3F7-3D6D480E4955}"/>
               </a:ext>
             </a:extLst>
           </p:cNvPr>
@@ -8035,7 +8046,7 @@
           <p:cNvPr id="2" name="Title 1">
             <a:extLst>
               <a:ext uri="{FF2B5EF4-FFF2-40B4-BE49-F238E27FC236}">
-                <a16:creationId xmlns:a16="http://schemas.microsoft.com/office/drawing/2014/main" xmlns="" id="{20B5ED18-7A07-47F1-8056-CD86B076AFE2}"/>
+                <a16:creationId xmlns:a16="http://schemas.microsoft.com/office/drawing/2014/main" id="{20B5ED18-7A07-47F1-8056-CD86B076AFE2}"/>
               </a:ext>
             </a:extLst>
           </p:cNvPr>
@@ -8063,7 +8074,7 @@
           <p:cNvPr id="4" name="Footer Placeholder 3">
             <a:extLst>
               <a:ext uri="{FF2B5EF4-FFF2-40B4-BE49-F238E27FC236}">
-                <a16:creationId xmlns:a16="http://schemas.microsoft.com/office/drawing/2014/main" xmlns="" id="{96356206-85FD-45F5-A1F7-128DB34C860F}"/>
+                <a16:creationId xmlns:a16="http://schemas.microsoft.com/office/drawing/2014/main" id="{96356206-85FD-45F5-A1F7-128DB34C860F}"/>
               </a:ext>
             </a:extLst>
           </p:cNvPr>
@@ -8092,7 +8103,7 @@
           <p:cNvPr id="5" name="Slide Number Placeholder 4">
             <a:extLst>
               <a:ext uri="{FF2B5EF4-FFF2-40B4-BE49-F238E27FC236}">
-                <a16:creationId xmlns:a16="http://schemas.microsoft.com/office/drawing/2014/main" xmlns="" id="{0203763F-C8CD-4BCB-9A0A-B10F000BC1DB}"/>
+                <a16:creationId xmlns:a16="http://schemas.microsoft.com/office/drawing/2014/main" id="{0203763F-C8CD-4BCB-9A0A-B10F000BC1DB}"/>
               </a:ext>
             </a:extLst>
           </p:cNvPr>
@@ -8151,7 +8162,7 @@
           <p:cNvPr id="3" name="Footer Placeholder 2">
             <a:extLst>
               <a:ext uri="{FF2B5EF4-FFF2-40B4-BE49-F238E27FC236}">
-                <a16:creationId xmlns:a16="http://schemas.microsoft.com/office/drawing/2014/main" xmlns="" id="{7AC6CA6E-C1AB-4B24-80C7-A4B12640BE6F}"/>
+                <a16:creationId xmlns:a16="http://schemas.microsoft.com/office/drawing/2014/main" id="{7AC6CA6E-C1AB-4B24-80C7-A4B12640BE6F}"/>
               </a:ext>
             </a:extLst>
           </p:cNvPr>
@@ -8180,7 +8191,7 @@
           <p:cNvPr id="4" name="Slide Number Placeholder 3">
             <a:extLst>
               <a:ext uri="{FF2B5EF4-FFF2-40B4-BE49-F238E27FC236}">
-                <a16:creationId xmlns:a16="http://schemas.microsoft.com/office/drawing/2014/main" xmlns="" id="{4F5EFB41-7AD3-4519-95E7-416BFA1AECAB}"/>
+                <a16:creationId xmlns:a16="http://schemas.microsoft.com/office/drawing/2014/main" id="{4F5EFB41-7AD3-4519-95E7-416BFA1AECAB}"/>
               </a:ext>
             </a:extLst>
           </p:cNvPr>
@@ -8239,7 +8250,7 @@
           <p:cNvPr id="2" name="Title 1">
             <a:extLst>
               <a:ext uri="{FF2B5EF4-FFF2-40B4-BE49-F238E27FC236}">
-                <a16:creationId xmlns:a16="http://schemas.microsoft.com/office/drawing/2014/main" xmlns="" id="{305BD6A3-F987-4FCC-A6EF-2EF0D33C0888}"/>
+                <a16:creationId xmlns:a16="http://schemas.microsoft.com/office/drawing/2014/main" id="{305BD6A3-F987-4FCC-A6EF-2EF0D33C0888}"/>
               </a:ext>
             </a:extLst>
           </p:cNvPr>
@@ -8276,7 +8287,7 @@
           <p:cNvPr id="3" name="Content Placeholder 2">
             <a:extLst>
               <a:ext uri="{FF2B5EF4-FFF2-40B4-BE49-F238E27FC236}">
-                <a16:creationId xmlns:a16="http://schemas.microsoft.com/office/drawing/2014/main" xmlns="" id="{4C3F06A0-63CE-4272-B90E-4F20296BFBEB}"/>
+                <a16:creationId xmlns:a16="http://schemas.microsoft.com/office/drawing/2014/main" id="{4C3F06A0-63CE-4272-B90E-4F20296BFBEB}"/>
               </a:ext>
             </a:extLst>
           </p:cNvPr>
@@ -8366,7 +8377,7 @@
           <p:cNvPr id="4" name="Text Placeholder 3">
             <a:extLst>
               <a:ext uri="{FF2B5EF4-FFF2-40B4-BE49-F238E27FC236}">
-                <a16:creationId xmlns:a16="http://schemas.microsoft.com/office/drawing/2014/main" xmlns="" id="{08467220-06E3-427A-B4D3-9B0030E09DBB}"/>
+                <a16:creationId xmlns:a16="http://schemas.microsoft.com/office/drawing/2014/main" id="{08467220-06E3-427A-B4D3-9B0030E09DBB}"/>
               </a:ext>
             </a:extLst>
           </p:cNvPr>
@@ -8437,7 +8448,7 @@
           <p:cNvPr id="6" name="Footer Placeholder 5">
             <a:extLst>
               <a:ext uri="{FF2B5EF4-FFF2-40B4-BE49-F238E27FC236}">
-                <a16:creationId xmlns:a16="http://schemas.microsoft.com/office/drawing/2014/main" xmlns="" id="{F5AEF53B-C85C-47DB-ADE4-C1D9FA682945}"/>
+                <a16:creationId xmlns:a16="http://schemas.microsoft.com/office/drawing/2014/main" id="{F5AEF53B-C85C-47DB-ADE4-C1D9FA682945}"/>
               </a:ext>
             </a:extLst>
           </p:cNvPr>
@@ -8466,7 +8477,7 @@
           <p:cNvPr id="7" name="Slide Number Placeholder 6">
             <a:extLst>
               <a:ext uri="{FF2B5EF4-FFF2-40B4-BE49-F238E27FC236}">
-                <a16:creationId xmlns:a16="http://schemas.microsoft.com/office/drawing/2014/main" xmlns="" id="{DFD4FD38-14E5-4C36-B948-8BF3F794ED8C}"/>
+                <a16:creationId xmlns:a16="http://schemas.microsoft.com/office/drawing/2014/main" id="{DFD4FD38-14E5-4C36-B948-8BF3F794ED8C}"/>
               </a:ext>
             </a:extLst>
           </p:cNvPr>
@@ -8525,7 +8536,7 @@
           <p:cNvPr id="2" name="Title 1">
             <a:extLst>
               <a:ext uri="{FF2B5EF4-FFF2-40B4-BE49-F238E27FC236}">
-                <a16:creationId xmlns:a16="http://schemas.microsoft.com/office/drawing/2014/main" xmlns="" id="{DF308F2A-1C19-4116-80DF-E24EDDF283FF}"/>
+                <a16:creationId xmlns:a16="http://schemas.microsoft.com/office/drawing/2014/main" id="{DF308F2A-1C19-4116-80DF-E24EDDF283FF}"/>
               </a:ext>
             </a:extLst>
           </p:cNvPr>
@@ -8562,7 +8573,7 @@
           <p:cNvPr id="3" name="Picture Placeholder 2">
             <a:extLst>
               <a:ext uri="{FF2B5EF4-FFF2-40B4-BE49-F238E27FC236}">
-                <a16:creationId xmlns:a16="http://schemas.microsoft.com/office/drawing/2014/main" xmlns="" id="{08A489A7-7CA6-4CC9-B634-FCB2E102C6B9}"/>
+                <a16:creationId xmlns:a16="http://schemas.microsoft.com/office/drawing/2014/main" id="{08A489A7-7CA6-4CC9-B634-FCB2E102C6B9}"/>
               </a:ext>
             </a:extLst>
           </p:cNvPr>
@@ -8633,7 +8644,7 @@
           <p:cNvPr id="4" name="Text Placeholder 3">
             <a:extLst>
               <a:ext uri="{FF2B5EF4-FFF2-40B4-BE49-F238E27FC236}">
-                <a16:creationId xmlns:a16="http://schemas.microsoft.com/office/drawing/2014/main" xmlns="" id="{7DF5F80D-1DB9-4E0A-8F68-924FC1C9C3BA}"/>
+                <a16:creationId xmlns:a16="http://schemas.microsoft.com/office/drawing/2014/main" id="{7DF5F80D-1DB9-4E0A-8F68-924FC1C9C3BA}"/>
               </a:ext>
             </a:extLst>
           </p:cNvPr>
@@ -8704,7 +8715,7 @@
           <p:cNvPr id="6" name="Footer Placeholder 5">
             <a:extLst>
               <a:ext uri="{FF2B5EF4-FFF2-40B4-BE49-F238E27FC236}">
-                <a16:creationId xmlns:a16="http://schemas.microsoft.com/office/drawing/2014/main" xmlns="" id="{08DA4DA3-10C7-48A6-9B15-38222B8CAD42}"/>
+                <a16:creationId xmlns:a16="http://schemas.microsoft.com/office/drawing/2014/main" id="{08DA4DA3-10C7-48A6-9B15-38222B8CAD42}"/>
               </a:ext>
             </a:extLst>
           </p:cNvPr>
@@ -8733,7 +8744,7 @@
           <p:cNvPr id="7" name="Slide Number Placeholder 6">
             <a:extLst>
               <a:ext uri="{FF2B5EF4-FFF2-40B4-BE49-F238E27FC236}">
-                <a16:creationId xmlns:a16="http://schemas.microsoft.com/office/drawing/2014/main" xmlns="" id="{E584E7EE-5B3B-427E-9807-020AEF8C7662}"/>
+                <a16:creationId xmlns:a16="http://schemas.microsoft.com/office/drawing/2014/main" id="{E584E7EE-5B3B-427E-9807-020AEF8C7662}"/>
               </a:ext>
             </a:extLst>
           </p:cNvPr>
@@ -8792,7 +8803,7 @@
           <p:cNvPr id="4" name="Freeform 15">
             <a:extLst>
               <a:ext uri="{FF2B5EF4-FFF2-40B4-BE49-F238E27FC236}">
-                <a16:creationId xmlns:a16="http://schemas.microsoft.com/office/drawing/2014/main" xmlns="" id="{079F0D65-9DED-1DC3-6E6D-E4AD5252A007}"/>
+                <a16:creationId xmlns:a16="http://schemas.microsoft.com/office/drawing/2014/main" id="{079F0D65-9DED-1DC3-6E6D-E4AD5252A007}"/>
               </a:ext>
             </a:extLst>
           </p:cNvPr>
@@ -8937,7 +8948,7 @@
           <p:cNvPr id="5" name="Freeform 18">
             <a:extLst>
               <a:ext uri="{FF2B5EF4-FFF2-40B4-BE49-F238E27FC236}">
-                <a16:creationId xmlns:a16="http://schemas.microsoft.com/office/drawing/2014/main" xmlns="" id="{9C605622-8F1F-632F-D5C0-1F2E7875EBA1}"/>
+                <a16:creationId xmlns:a16="http://schemas.microsoft.com/office/drawing/2014/main" id="{9C605622-8F1F-632F-D5C0-1F2E7875EBA1}"/>
               </a:ext>
             </a:extLst>
           </p:cNvPr>
@@ -9086,7 +9097,7 @@
           <p:cNvPr id="6" name="Freeform 12">
             <a:extLst>
               <a:ext uri="{FF2B5EF4-FFF2-40B4-BE49-F238E27FC236}">
-                <a16:creationId xmlns:a16="http://schemas.microsoft.com/office/drawing/2014/main" xmlns="" id="{919AB4B2-2D3A-FCB5-0314-CC465BCC0E5D}"/>
+                <a16:creationId xmlns:a16="http://schemas.microsoft.com/office/drawing/2014/main" id="{919AB4B2-2D3A-FCB5-0314-CC465BCC0E5D}"/>
               </a:ext>
             </a:extLst>
           </p:cNvPr>
@@ -9246,7 +9257,7 @@
           <p:cNvPr id="8" name="Slide Number Placeholder 7">
             <a:extLst>
               <a:ext uri="{FF2B5EF4-FFF2-40B4-BE49-F238E27FC236}">
-                <a16:creationId xmlns:a16="http://schemas.microsoft.com/office/drawing/2014/main" xmlns="" id="{692257B9-FE58-1976-7115-17E05E5819EA}"/>
+                <a16:creationId xmlns:a16="http://schemas.microsoft.com/office/drawing/2014/main" id="{692257B9-FE58-1976-7115-17E05E5819EA}"/>
               </a:ext>
             </a:extLst>
           </p:cNvPr>
@@ -9278,7 +9289,7 @@
           <p:cNvPr id="7" name="Footer Placeholder 6">
             <a:extLst>
               <a:ext uri="{FF2B5EF4-FFF2-40B4-BE49-F238E27FC236}">
-                <a16:creationId xmlns:a16="http://schemas.microsoft.com/office/drawing/2014/main" xmlns="" id="{BAF040BB-6465-852C-B53C-074E90BB09D1}"/>
+                <a16:creationId xmlns:a16="http://schemas.microsoft.com/office/drawing/2014/main" id="{BAF040BB-6465-852C-B53C-074E90BB09D1}"/>
               </a:ext>
             </a:extLst>
           </p:cNvPr>
@@ -9309,7 +9320,7 @@
           <p:cNvPr id="2" name="Title 1">
             <a:extLst>
               <a:ext uri="{FF2B5EF4-FFF2-40B4-BE49-F238E27FC236}">
-                <a16:creationId xmlns:a16="http://schemas.microsoft.com/office/drawing/2014/main" xmlns="" id="{3CD97974-B93C-4C96-B3F6-F69E3D6DE6CA}"/>
+                <a16:creationId xmlns:a16="http://schemas.microsoft.com/office/drawing/2014/main" id="{3CD97974-B93C-4C96-B3F6-F69E3D6DE6CA}"/>
               </a:ext>
             </a:extLst>
           </p:cNvPr>
@@ -9349,7 +9360,7 @@
           <p:cNvPr id="3" name="Content Placeholder 2">
             <a:extLst>
               <a:ext uri="{FF2B5EF4-FFF2-40B4-BE49-F238E27FC236}">
-                <a16:creationId xmlns:a16="http://schemas.microsoft.com/office/drawing/2014/main" xmlns="" id="{8A6FC6F2-80B4-49A7-9448-33FE2DF0E967}"/>
+                <a16:creationId xmlns:a16="http://schemas.microsoft.com/office/drawing/2014/main" id="{8A6FC6F2-80B4-49A7-9448-33FE2DF0E967}"/>
               </a:ext>
             </a:extLst>
           </p:cNvPr>
@@ -9463,7 +9474,7 @@
           <p:cNvPr id="25" name="Freeform: Shape 24">
             <a:extLst>
               <a:ext uri="{FF2B5EF4-FFF2-40B4-BE49-F238E27FC236}">
-                <a16:creationId xmlns:a16="http://schemas.microsoft.com/office/drawing/2014/main" xmlns="" id="{9BE68DE5-FB8F-C713-B589-69851789C6C5}"/>
+                <a16:creationId xmlns:a16="http://schemas.microsoft.com/office/drawing/2014/main" id="{9BE68DE5-FB8F-C713-B589-69851789C6C5}"/>
               </a:ext>
             </a:extLst>
           </p:cNvPr>
@@ -9619,7 +9630,7 @@
           <p:cNvPr id="22" name="Freeform: Shape 21">
             <a:extLst>
               <a:ext uri="{FF2B5EF4-FFF2-40B4-BE49-F238E27FC236}">
-                <a16:creationId xmlns:a16="http://schemas.microsoft.com/office/drawing/2014/main" xmlns="" id="{76B337A9-EA8E-4E30-3CF4-C681F9705934}"/>
+                <a16:creationId xmlns:a16="http://schemas.microsoft.com/office/drawing/2014/main" id="{76B337A9-EA8E-4E30-3CF4-C681F9705934}"/>
               </a:ext>
             </a:extLst>
           </p:cNvPr>
@@ -9754,7 +9765,7 @@
           <p:cNvPr id="15" name="Freeform: Shape 14">
             <a:extLst>
               <a:ext uri="{FF2B5EF4-FFF2-40B4-BE49-F238E27FC236}">
-                <a16:creationId xmlns:a16="http://schemas.microsoft.com/office/drawing/2014/main" xmlns="" id="{3385D1DB-F6B1-8F65-1FDB-5CDD731A6DFC}"/>
+                <a16:creationId xmlns:a16="http://schemas.microsoft.com/office/drawing/2014/main" id="{3385D1DB-F6B1-8F65-1FDB-5CDD731A6DFC}"/>
               </a:ext>
             </a:extLst>
           </p:cNvPr>
@@ -9896,7 +9907,7 @@
           <p:cNvPr id="11" name="glass card">
             <a:extLst>
               <a:ext uri="{FF2B5EF4-FFF2-40B4-BE49-F238E27FC236}">
-                <a16:creationId xmlns:a16="http://schemas.microsoft.com/office/drawing/2014/main" xmlns="" id="{BAC99002-32F5-F4C1-2519-F23274B0580C}"/>
+                <a16:creationId xmlns:a16="http://schemas.microsoft.com/office/drawing/2014/main" id="{BAC99002-32F5-F4C1-2519-F23274B0580C}"/>
               </a:ext>
             </a:extLst>
           </p:cNvPr>
@@ -10005,7 +10016,7 @@
           <p:cNvPr id="2" name="Title 1">
             <a:extLst>
               <a:ext uri="{FF2B5EF4-FFF2-40B4-BE49-F238E27FC236}">
-                <a16:creationId xmlns:a16="http://schemas.microsoft.com/office/drawing/2014/main" xmlns="" id="{494248F2-5264-4601-AA0B-6C092F77F2DD}"/>
+                <a16:creationId xmlns:a16="http://schemas.microsoft.com/office/drawing/2014/main" id="{494248F2-5264-4601-AA0B-6C092F77F2DD}"/>
               </a:ext>
             </a:extLst>
           </p:cNvPr>
@@ -10045,7 +10056,7 @@
           <p:cNvPr id="3" name="Subtitle 2">
             <a:extLst>
               <a:ext uri="{FF2B5EF4-FFF2-40B4-BE49-F238E27FC236}">
-                <a16:creationId xmlns:a16="http://schemas.microsoft.com/office/drawing/2014/main" xmlns="" id="{DCFB69D3-5632-4285-A209-9DCA67DA668C}"/>
+                <a16:creationId xmlns:a16="http://schemas.microsoft.com/office/drawing/2014/main" id="{DCFB69D3-5632-4285-A209-9DCA67DA668C}"/>
               </a:ext>
             </a:extLst>
           </p:cNvPr>
@@ -10121,7 +10132,7 @@
           <p:cNvPr id="27" name="Freeform: Shape 26">
             <a:extLst>
               <a:ext uri="{FF2B5EF4-FFF2-40B4-BE49-F238E27FC236}">
-                <a16:creationId xmlns:a16="http://schemas.microsoft.com/office/drawing/2014/main" xmlns="" id="{0DF239B3-DB66-3CD4-1BFE-4EBA82BC4A44}"/>
+                <a16:creationId xmlns:a16="http://schemas.microsoft.com/office/drawing/2014/main" id="{0DF239B3-DB66-3CD4-1BFE-4EBA82BC4A44}"/>
               </a:ext>
             </a:extLst>
           </p:cNvPr>
@@ -10256,7 +10267,7 @@
           <p:cNvPr id="28" name="Straight Connector 27">
             <a:extLst>
               <a:ext uri="{FF2B5EF4-FFF2-40B4-BE49-F238E27FC236}">
-                <a16:creationId xmlns:a16="http://schemas.microsoft.com/office/drawing/2014/main" xmlns="" id="{93303B57-FF55-B795-FAE7-5EF26BFCBEF3}"/>
+                <a16:creationId xmlns:a16="http://schemas.microsoft.com/office/drawing/2014/main" id="{93303B57-FF55-B795-FAE7-5EF26BFCBEF3}"/>
               </a:ext>
             </a:extLst>
           </p:cNvPr>
@@ -10329,7 +10340,7 @@
           <p:cNvPr id="2" name="Title 1">
             <a:extLst>
               <a:ext uri="{FF2B5EF4-FFF2-40B4-BE49-F238E27FC236}">
-                <a16:creationId xmlns:a16="http://schemas.microsoft.com/office/drawing/2014/main" xmlns="" id="{494248F2-5264-4601-AA0B-6C092F77F2DD}"/>
+                <a16:creationId xmlns:a16="http://schemas.microsoft.com/office/drawing/2014/main" id="{494248F2-5264-4601-AA0B-6C092F77F2DD}"/>
               </a:ext>
             </a:extLst>
           </p:cNvPr>
@@ -10369,7 +10380,7 @@
           <p:cNvPr id="3" name="Subtitle 2">
             <a:extLst>
               <a:ext uri="{FF2B5EF4-FFF2-40B4-BE49-F238E27FC236}">
-                <a16:creationId xmlns:a16="http://schemas.microsoft.com/office/drawing/2014/main" xmlns="" id="{DCFB69D3-5632-4285-A209-9DCA67DA668C}"/>
+                <a16:creationId xmlns:a16="http://schemas.microsoft.com/office/drawing/2014/main" id="{DCFB69D3-5632-4285-A209-9DCA67DA668C}"/>
               </a:ext>
             </a:extLst>
           </p:cNvPr>
@@ -10442,7 +10453,7 @@
           <p:cNvPr id="5" name="Freeform 3">
             <a:extLst>
               <a:ext uri="{FF2B5EF4-FFF2-40B4-BE49-F238E27FC236}">
-                <a16:creationId xmlns:a16="http://schemas.microsoft.com/office/drawing/2014/main" xmlns="" id="{F1F20C20-DE23-6FE7-74A0-517218ACED7A}"/>
+                <a16:creationId xmlns:a16="http://schemas.microsoft.com/office/drawing/2014/main" id="{F1F20C20-DE23-6FE7-74A0-517218ACED7A}"/>
               </a:ext>
             </a:extLst>
           </p:cNvPr>
@@ -10593,7 +10604,7 @@
           <p:cNvPr id="10" name="Freeform 4">
             <a:extLst>
               <a:ext uri="{FF2B5EF4-FFF2-40B4-BE49-F238E27FC236}">
-                <a16:creationId xmlns:a16="http://schemas.microsoft.com/office/drawing/2014/main" xmlns="" id="{98E2EA35-4179-2438-E1D1-02EFA8830FF9}"/>
+                <a16:creationId xmlns:a16="http://schemas.microsoft.com/office/drawing/2014/main" id="{98E2EA35-4179-2438-E1D1-02EFA8830FF9}"/>
               </a:ext>
             </a:extLst>
           </p:cNvPr>
@@ -10724,7 +10735,7 @@
           <p:cNvPr id="11" name="Freeform 5">
             <a:extLst>
               <a:ext uri="{FF2B5EF4-FFF2-40B4-BE49-F238E27FC236}">
-                <a16:creationId xmlns:a16="http://schemas.microsoft.com/office/drawing/2014/main" xmlns="" id="{A7C0B16B-87E9-E92C-62F3-D1844BEE5B2D}"/>
+                <a16:creationId xmlns:a16="http://schemas.microsoft.com/office/drawing/2014/main" id="{A7C0B16B-87E9-E92C-62F3-D1844BEE5B2D}"/>
               </a:ext>
             </a:extLst>
           </p:cNvPr>
@@ -10853,7 +10864,7 @@
           <p:cNvPr id="12" name="Freeform 6">
             <a:extLst>
               <a:ext uri="{FF2B5EF4-FFF2-40B4-BE49-F238E27FC236}">
-                <a16:creationId xmlns:a16="http://schemas.microsoft.com/office/drawing/2014/main" xmlns="" id="{51F4118C-3B46-F20B-EF12-E16F7513844C}"/>
+                <a16:creationId xmlns:a16="http://schemas.microsoft.com/office/drawing/2014/main" id="{51F4118C-3B46-F20B-EF12-E16F7513844C}"/>
               </a:ext>
             </a:extLst>
           </p:cNvPr>
@@ -11046,7 +11057,7 @@
           <p:cNvPr id="13" name="Straight Connector 12">
             <a:extLst>
               <a:ext uri="{FF2B5EF4-FFF2-40B4-BE49-F238E27FC236}">
-                <a16:creationId xmlns:a16="http://schemas.microsoft.com/office/drawing/2014/main" xmlns="" id="{CD0F8AA9-2207-2D4C-C2E0-FEF14E2D9ACF}"/>
+                <a16:creationId xmlns:a16="http://schemas.microsoft.com/office/drawing/2014/main" id="{CD0F8AA9-2207-2D4C-C2E0-FEF14E2D9ACF}"/>
               </a:ext>
             </a:extLst>
           </p:cNvPr>
@@ -11119,7 +11130,7 @@
           <p:cNvPr id="2" name="Title 1">
             <a:extLst>
               <a:ext uri="{FF2B5EF4-FFF2-40B4-BE49-F238E27FC236}">
-                <a16:creationId xmlns:a16="http://schemas.microsoft.com/office/drawing/2014/main" xmlns="" id="{3CD97974-B93C-4C96-B3F6-F69E3D6DE6CA}"/>
+                <a16:creationId xmlns:a16="http://schemas.microsoft.com/office/drawing/2014/main" id="{3CD97974-B93C-4C96-B3F6-F69E3D6DE6CA}"/>
               </a:ext>
             </a:extLst>
           </p:cNvPr>
@@ -11154,7 +11165,7 @@
           <p:cNvPr id="3" name="Content Placeholder 2">
             <a:extLst>
               <a:ext uri="{FF2B5EF4-FFF2-40B4-BE49-F238E27FC236}">
-                <a16:creationId xmlns:a16="http://schemas.microsoft.com/office/drawing/2014/main" xmlns="" id="{8A6FC6F2-80B4-49A7-9448-33FE2DF0E967}"/>
+                <a16:creationId xmlns:a16="http://schemas.microsoft.com/office/drawing/2014/main" id="{8A6FC6F2-80B4-49A7-9448-33FE2DF0E967}"/>
               </a:ext>
             </a:extLst>
           </p:cNvPr>
@@ -11214,7 +11225,7 @@
           <p:cNvPr id="5" name="Slide Number Placeholder 4">
             <a:extLst>
               <a:ext uri="{FF2B5EF4-FFF2-40B4-BE49-F238E27FC236}">
-                <a16:creationId xmlns:a16="http://schemas.microsoft.com/office/drawing/2014/main" xmlns="" id="{4A4F769D-48D3-2655-40A4-674F657B741D}"/>
+                <a16:creationId xmlns:a16="http://schemas.microsoft.com/office/drawing/2014/main" id="{4A4F769D-48D3-2655-40A4-674F657B741D}"/>
               </a:ext>
             </a:extLst>
           </p:cNvPr>
@@ -11246,7 +11257,7 @@
           <p:cNvPr id="4" name="Footer Placeholder 3">
             <a:extLst>
               <a:ext uri="{FF2B5EF4-FFF2-40B4-BE49-F238E27FC236}">
-                <a16:creationId xmlns:a16="http://schemas.microsoft.com/office/drawing/2014/main" xmlns="" id="{33FA0756-78EA-68DD-4650-F40EF5F2520E}"/>
+                <a16:creationId xmlns:a16="http://schemas.microsoft.com/office/drawing/2014/main" id="{33FA0756-78EA-68DD-4650-F40EF5F2520E}"/>
               </a:ext>
             </a:extLst>
           </p:cNvPr>
@@ -11307,7 +11318,7 @@
           <p:cNvPr id="21" name="Freeform 6">
             <a:extLst>
               <a:ext uri="{FF2B5EF4-FFF2-40B4-BE49-F238E27FC236}">
-                <a16:creationId xmlns:a16="http://schemas.microsoft.com/office/drawing/2014/main" xmlns="" id="{77AD3460-2264-3A46-993B-9F2AACED0504}"/>
+                <a16:creationId xmlns:a16="http://schemas.microsoft.com/office/drawing/2014/main" id="{77AD3460-2264-3A46-993B-9F2AACED0504}"/>
               </a:ext>
             </a:extLst>
           </p:cNvPr>
@@ -11436,7 +11447,7 @@
           <p:cNvPr id="22" name="Freeform 7">
             <a:extLst>
               <a:ext uri="{FF2B5EF4-FFF2-40B4-BE49-F238E27FC236}">
-                <a16:creationId xmlns:a16="http://schemas.microsoft.com/office/drawing/2014/main" xmlns="" id="{BBBF3E9C-CCEA-98FA-7F69-55AF07558021}"/>
+                <a16:creationId xmlns:a16="http://schemas.microsoft.com/office/drawing/2014/main" id="{BBBF3E9C-CCEA-98FA-7F69-55AF07558021}"/>
               </a:ext>
             </a:extLst>
           </p:cNvPr>
@@ -11587,7 +11598,7 @@
           <p:cNvPr id="23" name="Freeform 9">
             <a:extLst>
               <a:ext uri="{FF2B5EF4-FFF2-40B4-BE49-F238E27FC236}">
-                <a16:creationId xmlns:a16="http://schemas.microsoft.com/office/drawing/2014/main" xmlns="" id="{4F937A84-95EC-EB44-470A-C82AD8E99897}"/>
+                <a16:creationId xmlns:a16="http://schemas.microsoft.com/office/drawing/2014/main" id="{4F937A84-95EC-EB44-470A-C82AD8E99897}"/>
               </a:ext>
             </a:extLst>
           </p:cNvPr>
@@ -11934,7 +11945,7 @@
           <p:cNvPr id="24" name="Freeform 10">
             <a:extLst>
               <a:ext uri="{FF2B5EF4-FFF2-40B4-BE49-F238E27FC236}">
-                <a16:creationId xmlns:a16="http://schemas.microsoft.com/office/drawing/2014/main" xmlns="" id="{A9BF091C-5F88-B50F-03BB-284950253993}"/>
+                <a16:creationId xmlns:a16="http://schemas.microsoft.com/office/drawing/2014/main" id="{A9BF091C-5F88-B50F-03BB-284950253993}"/>
               </a:ext>
             </a:extLst>
           </p:cNvPr>
@@ -12063,7 +12074,7 @@
           <p:cNvPr id="25" name="Freeform 16">
             <a:extLst>
               <a:ext uri="{FF2B5EF4-FFF2-40B4-BE49-F238E27FC236}">
-                <a16:creationId xmlns:a16="http://schemas.microsoft.com/office/drawing/2014/main" xmlns="" id="{3FF8B459-35F5-072D-56FA-415EEABE6DC2}"/>
+                <a16:creationId xmlns:a16="http://schemas.microsoft.com/office/drawing/2014/main" id="{3FF8B459-35F5-072D-56FA-415EEABE6DC2}"/>
               </a:ext>
             </a:extLst>
           </p:cNvPr>
@@ -12256,7 +12267,7 @@
           <p:cNvPr id="26" name="Freeform 17">
             <a:extLst>
               <a:ext uri="{FF2B5EF4-FFF2-40B4-BE49-F238E27FC236}">
-                <a16:creationId xmlns:a16="http://schemas.microsoft.com/office/drawing/2014/main" xmlns="" id="{73867BC1-390E-647F-B33F-8622748E6530}"/>
+                <a16:creationId xmlns:a16="http://schemas.microsoft.com/office/drawing/2014/main" id="{73867BC1-390E-647F-B33F-8622748E6530}"/>
               </a:ext>
             </a:extLst>
           </p:cNvPr>
@@ -12449,7 +12460,7 @@
           <p:cNvPr id="27" name="Freeform 18">
             <a:extLst>
               <a:ext uri="{FF2B5EF4-FFF2-40B4-BE49-F238E27FC236}">
-                <a16:creationId xmlns:a16="http://schemas.microsoft.com/office/drawing/2014/main" xmlns="" id="{FA6C5756-59FF-66C3-2611-3D7AB2049ABE}"/>
+                <a16:creationId xmlns:a16="http://schemas.microsoft.com/office/drawing/2014/main" id="{FA6C5756-59FF-66C3-2611-3D7AB2049ABE}"/>
               </a:ext>
             </a:extLst>
           </p:cNvPr>
@@ -12600,7 +12611,7 @@
           <p:cNvPr id="28" name="Freeform 19">
             <a:extLst>
               <a:ext uri="{FF2B5EF4-FFF2-40B4-BE49-F238E27FC236}">
-                <a16:creationId xmlns:a16="http://schemas.microsoft.com/office/drawing/2014/main" xmlns="" id="{EF6D3160-DA6D-8CDA-3A13-8A43EC05449D}"/>
+                <a16:creationId xmlns:a16="http://schemas.microsoft.com/office/drawing/2014/main" id="{EF6D3160-DA6D-8CDA-3A13-8A43EC05449D}"/>
               </a:ext>
             </a:extLst>
           </p:cNvPr>
@@ -12729,7 +12740,7 @@
           <p:cNvPr id="2" name="Title 1">
             <a:extLst>
               <a:ext uri="{FF2B5EF4-FFF2-40B4-BE49-F238E27FC236}">
-                <a16:creationId xmlns:a16="http://schemas.microsoft.com/office/drawing/2014/main" xmlns="" id="{494248F2-5264-4601-AA0B-6C092F77F2DD}"/>
+                <a16:creationId xmlns:a16="http://schemas.microsoft.com/office/drawing/2014/main" id="{494248F2-5264-4601-AA0B-6C092F77F2DD}"/>
               </a:ext>
             </a:extLst>
           </p:cNvPr>
@@ -12772,7 +12783,7 @@
           <p:cNvPr id="3" name="Subtitle 2">
             <a:extLst>
               <a:ext uri="{FF2B5EF4-FFF2-40B4-BE49-F238E27FC236}">
-                <a16:creationId xmlns:a16="http://schemas.microsoft.com/office/drawing/2014/main" xmlns="" id="{DCFB69D3-5632-4285-A209-9DCA67DA668C}"/>
+                <a16:creationId xmlns:a16="http://schemas.microsoft.com/office/drawing/2014/main" id="{DCFB69D3-5632-4285-A209-9DCA67DA668C}"/>
               </a:ext>
             </a:extLst>
           </p:cNvPr>
@@ -12875,7 +12886,7 @@
           <p:cNvPr id="51" name="Text Placeholder 50">
             <a:extLst>
               <a:ext uri="{FF2B5EF4-FFF2-40B4-BE49-F238E27FC236}">
-                <a16:creationId xmlns:a16="http://schemas.microsoft.com/office/drawing/2014/main" xmlns="" id="{100A0D9B-ADC5-C41B-130F-1EA1EDE9F2E2}"/>
+                <a16:creationId xmlns:a16="http://schemas.microsoft.com/office/drawing/2014/main" id="{100A0D9B-ADC5-C41B-130F-1EA1EDE9F2E2}"/>
               </a:ext>
             </a:extLst>
           </p:cNvPr>
@@ -12983,7 +12994,7 @@
           <p:cNvPr id="2" name="Title 1">
             <a:extLst>
               <a:ext uri="{FF2B5EF4-FFF2-40B4-BE49-F238E27FC236}">
-                <a16:creationId xmlns:a16="http://schemas.microsoft.com/office/drawing/2014/main" xmlns="" id="{2653694F-11E9-3CF0-DCDE-FC7C6FAF569D}"/>
+                <a16:creationId xmlns:a16="http://schemas.microsoft.com/office/drawing/2014/main" id="{2653694F-11E9-3CF0-DCDE-FC7C6FAF569D}"/>
               </a:ext>
             </a:extLst>
           </p:cNvPr>
@@ -13020,7 +13031,7 @@
           <p:cNvPr id="57" name="Text Placeholder 56">
             <a:extLst>
               <a:ext uri="{FF2B5EF4-FFF2-40B4-BE49-F238E27FC236}">
-                <a16:creationId xmlns:a16="http://schemas.microsoft.com/office/drawing/2014/main" xmlns="" id="{9AF8AEFF-3F3B-8AFC-621B-F653E2F1B744}"/>
+                <a16:creationId xmlns:a16="http://schemas.microsoft.com/office/drawing/2014/main" id="{9AF8AEFF-3F3B-8AFC-621B-F653E2F1B744}"/>
               </a:ext>
             </a:extLst>
           </p:cNvPr>
@@ -13160,7 +13171,7 @@
           <p:cNvPr id="52" name="Text Placeholder 51">
             <a:extLst>
               <a:ext uri="{FF2B5EF4-FFF2-40B4-BE49-F238E27FC236}">
-                <a16:creationId xmlns:a16="http://schemas.microsoft.com/office/drawing/2014/main" xmlns="" id="{C0111168-089D-E125-6CBB-0B288CE8D5B0}"/>
+                <a16:creationId xmlns:a16="http://schemas.microsoft.com/office/drawing/2014/main" id="{C0111168-089D-E125-6CBB-0B288CE8D5B0}"/>
               </a:ext>
             </a:extLst>
           </p:cNvPr>
@@ -13268,7 +13279,7 @@
           <p:cNvPr id="21" name="Text Placeholder 11">
             <a:extLst>
               <a:ext uri="{FF2B5EF4-FFF2-40B4-BE49-F238E27FC236}">
-                <a16:creationId xmlns:a16="http://schemas.microsoft.com/office/drawing/2014/main" xmlns="" id="{20FBF32C-8DDB-F094-1C74-FDE91B64F981}"/>
+                <a16:creationId xmlns:a16="http://schemas.microsoft.com/office/drawing/2014/main" id="{20FBF32C-8DDB-F094-1C74-FDE91B64F981}"/>
               </a:ext>
             </a:extLst>
           </p:cNvPr>
@@ -13326,7 +13337,7 @@
           <p:cNvPr id="22" name="Text Placeholder 11">
             <a:extLst>
               <a:ext uri="{FF2B5EF4-FFF2-40B4-BE49-F238E27FC236}">
-                <a16:creationId xmlns:a16="http://schemas.microsoft.com/office/drawing/2014/main" xmlns="" id="{C5237567-8AEF-3966-7CED-5DA3ACD21E7B}"/>
+                <a16:creationId xmlns:a16="http://schemas.microsoft.com/office/drawing/2014/main" id="{C5237567-8AEF-3966-7CED-5DA3ACD21E7B}"/>
               </a:ext>
             </a:extLst>
           </p:cNvPr>
@@ -13376,7 +13387,7 @@
           <p:cNvPr id="23" name="Text Placeholder 11">
             <a:extLst>
               <a:ext uri="{FF2B5EF4-FFF2-40B4-BE49-F238E27FC236}">
-                <a16:creationId xmlns:a16="http://schemas.microsoft.com/office/drawing/2014/main" xmlns="" id="{7137587B-C03C-671F-AED7-4B974605AF4F}"/>
+                <a16:creationId xmlns:a16="http://schemas.microsoft.com/office/drawing/2014/main" id="{7137587B-C03C-671F-AED7-4B974605AF4F}"/>
               </a:ext>
             </a:extLst>
           </p:cNvPr>
@@ -13434,7 +13445,7 @@
           <p:cNvPr id="24" name="Text Placeholder 11">
             <a:extLst>
               <a:ext uri="{FF2B5EF4-FFF2-40B4-BE49-F238E27FC236}">
-                <a16:creationId xmlns:a16="http://schemas.microsoft.com/office/drawing/2014/main" xmlns="" id="{25D4A96A-10D9-D4AD-C775-61041F026BA1}"/>
+                <a16:creationId xmlns:a16="http://schemas.microsoft.com/office/drawing/2014/main" id="{25D4A96A-10D9-D4AD-C775-61041F026BA1}"/>
               </a:ext>
             </a:extLst>
           </p:cNvPr>
@@ -13484,7 +13495,7 @@
           <p:cNvPr id="25" name="Text Placeholder 11">
             <a:extLst>
               <a:ext uri="{FF2B5EF4-FFF2-40B4-BE49-F238E27FC236}">
-                <a16:creationId xmlns:a16="http://schemas.microsoft.com/office/drawing/2014/main" xmlns="" id="{81308FE1-98CC-9FD0-5CF1-5A8E61C5BA93}"/>
+                <a16:creationId xmlns:a16="http://schemas.microsoft.com/office/drawing/2014/main" id="{81308FE1-98CC-9FD0-5CF1-5A8E61C5BA93}"/>
               </a:ext>
             </a:extLst>
           </p:cNvPr>
@@ -13542,7 +13553,7 @@
           <p:cNvPr id="26" name="Text Placeholder 11">
             <a:extLst>
               <a:ext uri="{FF2B5EF4-FFF2-40B4-BE49-F238E27FC236}">
-                <a16:creationId xmlns:a16="http://schemas.microsoft.com/office/drawing/2014/main" xmlns="" id="{B6FB197B-711E-A949-62E5-216CBC83FFBC}"/>
+                <a16:creationId xmlns:a16="http://schemas.microsoft.com/office/drawing/2014/main" id="{B6FB197B-711E-A949-62E5-216CBC83FFBC}"/>
               </a:ext>
             </a:extLst>
           </p:cNvPr>
@@ -13592,7 +13603,7 @@
           <p:cNvPr id="55" name="Text Placeholder 54">
             <a:extLst>
               <a:ext uri="{FF2B5EF4-FFF2-40B4-BE49-F238E27FC236}">
-                <a16:creationId xmlns:a16="http://schemas.microsoft.com/office/drawing/2014/main" xmlns="" id="{76A5CBAC-0099-3E8F-E44D-7B999D707964}"/>
+                <a16:creationId xmlns:a16="http://schemas.microsoft.com/office/drawing/2014/main" id="{76A5CBAC-0099-3E8F-E44D-7B999D707964}"/>
               </a:ext>
             </a:extLst>
           </p:cNvPr>
@@ -13762,7 +13773,7 @@
           <p:cNvPr id="2" name="Title 1">
             <a:extLst>
               <a:ext uri="{FF2B5EF4-FFF2-40B4-BE49-F238E27FC236}">
-                <a16:creationId xmlns:a16="http://schemas.microsoft.com/office/drawing/2014/main" xmlns="" id="{2653694F-11E9-3CF0-DCDE-FC7C6FAF569D}"/>
+                <a16:creationId xmlns:a16="http://schemas.microsoft.com/office/drawing/2014/main" id="{2653694F-11E9-3CF0-DCDE-FC7C6FAF569D}"/>
               </a:ext>
             </a:extLst>
           </p:cNvPr>
@@ -13799,7 +13810,7 @@
           <p:cNvPr id="3" name="Footer Placeholder 2">
             <a:extLst>
               <a:ext uri="{FF2B5EF4-FFF2-40B4-BE49-F238E27FC236}">
-                <a16:creationId xmlns:a16="http://schemas.microsoft.com/office/drawing/2014/main" xmlns="" id="{CC652500-B558-F785-439F-12315F433125}"/>
+                <a16:creationId xmlns:a16="http://schemas.microsoft.com/office/drawing/2014/main" id="{CC652500-B558-F785-439F-12315F433125}"/>
               </a:ext>
             </a:extLst>
           </p:cNvPr>
@@ -13828,7 +13839,7 @@
           <p:cNvPr id="4" name="Slide Number Placeholder 3">
             <a:extLst>
               <a:ext uri="{FF2B5EF4-FFF2-40B4-BE49-F238E27FC236}">
-                <a16:creationId xmlns:a16="http://schemas.microsoft.com/office/drawing/2014/main" xmlns="" id="{938A96B1-64D5-11B6-BD02-AD31F317296F}"/>
+                <a16:creationId xmlns:a16="http://schemas.microsoft.com/office/drawing/2014/main" id="{938A96B1-64D5-11B6-BD02-AD31F317296F}"/>
               </a:ext>
             </a:extLst>
           </p:cNvPr>
@@ -13858,7 +13869,7 @@
           <p:cNvPr id="5" name="Straight Connector 4">
             <a:extLst>
               <a:ext uri="{FF2B5EF4-FFF2-40B4-BE49-F238E27FC236}">
-                <a16:creationId xmlns:a16="http://schemas.microsoft.com/office/drawing/2014/main" xmlns="" id="{2C883D99-31C6-D5A2-D86A-FC9440CEA769}"/>
+                <a16:creationId xmlns:a16="http://schemas.microsoft.com/office/drawing/2014/main" id="{2C883D99-31C6-D5A2-D86A-FC9440CEA769}"/>
               </a:ext>
             </a:extLst>
           </p:cNvPr>
@@ -13902,7 +13913,7 @@
           <p:cNvPr id="6" name="Straight Connector 5">
             <a:extLst>
               <a:ext uri="{FF2B5EF4-FFF2-40B4-BE49-F238E27FC236}">
-                <a16:creationId xmlns:a16="http://schemas.microsoft.com/office/drawing/2014/main" xmlns="" id="{238AB5A6-6184-8A00-738A-9F575C1472CC}"/>
+                <a16:creationId xmlns:a16="http://schemas.microsoft.com/office/drawing/2014/main" id="{238AB5A6-6184-8A00-738A-9F575C1472CC}"/>
               </a:ext>
             </a:extLst>
           </p:cNvPr>
@@ -13946,7 +13957,7 @@
           <p:cNvPr id="7" name="Straight Connector 6">
             <a:extLst>
               <a:ext uri="{FF2B5EF4-FFF2-40B4-BE49-F238E27FC236}">
-                <a16:creationId xmlns:a16="http://schemas.microsoft.com/office/drawing/2014/main" xmlns="" id="{70BFB726-8911-1D40-8CAD-0678A3988661}"/>
+                <a16:creationId xmlns:a16="http://schemas.microsoft.com/office/drawing/2014/main" id="{70BFB726-8911-1D40-8CAD-0678A3988661}"/>
               </a:ext>
             </a:extLst>
           </p:cNvPr>
@@ -13990,7 +14001,7 @@
           <p:cNvPr id="8" name="Straight Connector 7">
             <a:extLst>
               <a:ext uri="{FF2B5EF4-FFF2-40B4-BE49-F238E27FC236}">
-                <a16:creationId xmlns:a16="http://schemas.microsoft.com/office/drawing/2014/main" xmlns="" id="{3A06BA5D-5C40-149B-0AE7-118CF43109F3}"/>
+                <a16:creationId xmlns:a16="http://schemas.microsoft.com/office/drawing/2014/main" id="{3A06BA5D-5C40-149B-0AE7-118CF43109F3}"/>
               </a:ext>
             </a:extLst>
           </p:cNvPr>
@@ -14034,7 +14045,7 @@
           <p:cNvPr id="9" name="Oval 8">
             <a:extLst>
               <a:ext uri="{FF2B5EF4-FFF2-40B4-BE49-F238E27FC236}">
-                <a16:creationId xmlns:a16="http://schemas.microsoft.com/office/drawing/2014/main" xmlns="" id="{0E1F9F84-FEDF-EE4B-151E-0BA753B313F2}"/>
+                <a16:creationId xmlns:a16="http://schemas.microsoft.com/office/drawing/2014/main" id="{0E1F9F84-FEDF-EE4B-151E-0BA753B313F2}"/>
               </a:ext>
             </a:extLst>
           </p:cNvPr>
@@ -14086,7 +14097,7 @@
           <p:cNvPr id="10" name="Oval 9">
             <a:extLst>
               <a:ext uri="{FF2B5EF4-FFF2-40B4-BE49-F238E27FC236}">
-                <a16:creationId xmlns:a16="http://schemas.microsoft.com/office/drawing/2014/main" xmlns="" id="{B5D1979A-4075-FDBC-DC21-B473A894753D}"/>
+                <a16:creationId xmlns:a16="http://schemas.microsoft.com/office/drawing/2014/main" id="{B5D1979A-4075-FDBC-DC21-B473A894753D}"/>
               </a:ext>
             </a:extLst>
           </p:cNvPr>
@@ -14138,7 +14149,7 @@
           <p:cNvPr id="11" name="Oval 10">
             <a:extLst>
               <a:ext uri="{FF2B5EF4-FFF2-40B4-BE49-F238E27FC236}">
-                <a16:creationId xmlns:a16="http://schemas.microsoft.com/office/drawing/2014/main" xmlns="" id="{4253DC90-8B68-11F4-262C-EF788CC251ED}"/>
+                <a16:creationId xmlns:a16="http://schemas.microsoft.com/office/drawing/2014/main" id="{4253DC90-8B68-11F4-262C-EF788CC251ED}"/>
               </a:ext>
             </a:extLst>
           </p:cNvPr>
@@ -14190,7 +14201,7 @@
           <p:cNvPr id="12" name="Oval 11">
             <a:extLst>
               <a:ext uri="{FF2B5EF4-FFF2-40B4-BE49-F238E27FC236}">
-                <a16:creationId xmlns:a16="http://schemas.microsoft.com/office/drawing/2014/main" xmlns="" id="{8CEBAA34-A280-D694-891B-142A8D7FA33C}"/>
+                <a16:creationId xmlns:a16="http://schemas.microsoft.com/office/drawing/2014/main" id="{8CEBAA34-A280-D694-891B-142A8D7FA33C}"/>
               </a:ext>
             </a:extLst>
           </p:cNvPr>
@@ -14242,7 +14253,7 @@
           <p:cNvPr id="13" name="Oval 12">
             <a:extLst>
               <a:ext uri="{FF2B5EF4-FFF2-40B4-BE49-F238E27FC236}">
-                <a16:creationId xmlns:a16="http://schemas.microsoft.com/office/drawing/2014/main" xmlns="" id="{DEC576C9-CAB6-8D5D-5976-B4CC1FB6B5C0}"/>
+                <a16:creationId xmlns:a16="http://schemas.microsoft.com/office/drawing/2014/main" id="{DEC576C9-CAB6-8D5D-5976-B4CC1FB6B5C0}"/>
               </a:ext>
             </a:extLst>
           </p:cNvPr>
@@ -14294,7 +14305,7 @@
           <p:cNvPr id="14" name="Oval 13">
             <a:extLst>
               <a:ext uri="{FF2B5EF4-FFF2-40B4-BE49-F238E27FC236}">
-                <a16:creationId xmlns:a16="http://schemas.microsoft.com/office/drawing/2014/main" xmlns="" id="{0B3AAAB5-1B7C-5567-E7F2-E97DCAFEA821}"/>
+                <a16:creationId xmlns:a16="http://schemas.microsoft.com/office/drawing/2014/main" id="{0B3AAAB5-1B7C-5567-E7F2-E97DCAFEA821}"/>
               </a:ext>
             </a:extLst>
           </p:cNvPr>
@@ -14346,7 +14357,7 @@
           <p:cNvPr id="15" name="Oval 14">
             <a:extLst>
               <a:ext uri="{FF2B5EF4-FFF2-40B4-BE49-F238E27FC236}">
-                <a16:creationId xmlns:a16="http://schemas.microsoft.com/office/drawing/2014/main" xmlns="" id="{C6E861CF-DCF3-E6B9-1438-583DC69FFA06}"/>
+                <a16:creationId xmlns:a16="http://schemas.microsoft.com/office/drawing/2014/main" id="{C6E861CF-DCF3-E6B9-1438-583DC69FFA06}"/>
               </a:ext>
             </a:extLst>
           </p:cNvPr>
@@ -14398,7 +14409,7 @@
           <p:cNvPr id="16" name="Oval 15">
             <a:extLst>
               <a:ext uri="{FF2B5EF4-FFF2-40B4-BE49-F238E27FC236}">
-                <a16:creationId xmlns:a16="http://schemas.microsoft.com/office/drawing/2014/main" xmlns="" id="{0F4D24E5-CE49-C81C-1933-88384A77E742}"/>
+                <a16:creationId xmlns:a16="http://schemas.microsoft.com/office/drawing/2014/main" id="{0F4D24E5-CE49-C81C-1933-88384A77E742}"/>
               </a:ext>
             </a:extLst>
           </p:cNvPr>
@@ -14450,7 +14461,7 @@
           <p:cNvPr id="17" name="Oval 16">
             <a:extLst>
               <a:ext uri="{FF2B5EF4-FFF2-40B4-BE49-F238E27FC236}">
-                <a16:creationId xmlns:a16="http://schemas.microsoft.com/office/drawing/2014/main" xmlns="" id="{0F1CA68B-CB89-15A1-13F9-3DD65297D0BD}"/>
+                <a16:creationId xmlns:a16="http://schemas.microsoft.com/office/drawing/2014/main" id="{0F1CA68B-CB89-15A1-13F9-3DD65297D0BD}"/>
               </a:ext>
             </a:extLst>
           </p:cNvPr>
@@ -14502,7 +14513,7 @@
           <p:cNvPr id="18" name="Oval 17">
             <a:extLst>
               <a:ext uri="{FF2B5EF4-FFF2-40B4-BE49-F238E27FC236}">
-                <a16:creationId xmlns:a16="http://schemas.microsoft.com/office/drawing/2014/main" xmlns="" id="{3AD773FD-C1E4-FDB0-FDF1-0925375BE2A5}"/>
+                <a16:creationId xmlns:a16="http://schemas.microsoft.com/office/drawing/2014/main" id="{3AD773FD-C1E4-FDB0-FDF1-0925375BE2A5}"/>
               </a:ext>
             </a:extLst>
           </p:cNvPr>
@@ -14554,7 +14565,7 @@
           <p:cNvPr id="19" name="Text Placeholder 11">
             <a:extLst>
               <a:ext uri="{FF2B5EF4-FFF2-40B4-BE49-F238E27FC236}">
-                <a16:creationId xmlns:a16="http://schemas.microsoft.com/office/drawing/2014/main" xmlns="" id="{ACA633AF-3209-BF0D-1450-6A91ACC8533F}"/>
+                <a16:creationId xmlns:a16="http://schemas.microsoft.com/office/drawing/2014/main" id="{ACA633AF-3209-BF0D-1450-6A91ACC8533F}"/>
               </a:ext>
             </a:extLst>
           </p:cNvPr>
@@ -14601,7 +14612,7 @@
           <p:cNvPr id="20" name="Text Placeholder 11">
             <a:extLst>
               <a:ext uri="{FF2B5EF4-FFF2-40B4-BE49-F238E27FC236}">
-                <a16:creationId xmlns:a16="http://schemas.microsoft.com/office/drawing/2014/main" xmlns="" id="{F70EFB68-D184-8E31-A027-F291D78776BF}"/>
+                <a16:creationId xmlns:a16="http://schemas.microsoft.com/office/drawing/2014/main" id="{F70EFB68-D184-8E31-A027-F291D78776BF}"/>
               </a:ext>
             </a:extLst>
           </p:cNvPr>
@@ -14646,7 +14657,7 @@
           <p:cNvPr id="21" name="Text Placeholder 11">
             <a:extLst>
               <a:ext uri="{FF2B5EF4-FFF2-40B4-BE49-F238E27FC236}">
-                <a16:creationId xmlns:a16="http://schemas.microsoft.com/office/drawing/2014/main" xmlns="" id="{20FBF32C-8DDB-F094-1C74-FDE91B64F981}"/>
+                <a16:creationId xmlns:a16="http://schemas.microsoft.com/office/drawing/2014/main" id="{20FBF32C-8DDB-F094-1C74-FDE91B64F981}"/>
               </a:ext>
             </a:extLst>
           </p:cNvPr>
@@ -14693,7 +14704,7 @@
           <p:cNvPr id="22" name="Text Placeholder 11">
             <a:extLst>
               <a:ext uri="{FF2B5EF4-FFF2-40B4-BE49-F238E27FC236}">
-                <a16:creationId xmlns:a16="http://schemas.microsoft.com/office/drawing/2014/main" xmlns="" id="{C5237567-8AEF-3966-7CED-5DA3ACD21E7B}"/>
+                <a16:creationId xmlns:a16="http://schemas.microsoft.com/office/drawing/2014/main" id="{C5237567-8AEF-3966-7CED-5DA3ACD21E7B}"/>
               </a:ext>
             </a:extLst>
           </p:cNvPr>
@@ -14738,7 +14749,7 @@
           <p:cNvPr id="23" name="Text Placeholder 11">
             <a:extLst>
               <a:ext uri="{FF2B5EF4-FFF2-40B4-BE49-F238E27FC236}">
-                <a16:creationId xmlns:a16="http://schemas.microsoft.com/office/drawing/2014/main" xmlns="" id="{7137587B-C03C-671F-AED7-4B974605AF4F}"/>
+                <a16:creationId xmlns:a16="http://schemas.microsoft.com/office/drawing/2014/main" id="{7137587B-C03C-671F-AED7-4B974605AF4F}"/>
               </a:ext>
             </a:extLst>
           </p:cNvPr>
@@ -14785,7 +14796,7 @@
           <p:cNvPr id="24" name="Text Placeholder 11">
             <a:extLst>
               <a:ext uri="{FF2B5EF4-FFF2-40B4-BE49-F238E27FC236}">
-                <a16:creationId xmlns:a16="http://schemas.microsoft.com/office/drawing/2014/main" xmlns="" id="{25D4A96A-10D9-D4AD-C775-61041F026BA1}"/>
+                <a16:creationId xmlns:a16="http://schemas.microsoft.com/office/drawing/2014/main" id="{25D4A96A-10D9-D4AD-C775-61041F026BA1}"/>
               </a:ext>
             </a:extLst>
           </p:cNvPr>
@@ -14830,7 +14841,7 @@
           <p:cNvPr id="25" name="Text Placeholder 11">
             <a:extLst>
               <a:ext uri="{FF2B5EF4-FFF2-40B4-BE49-F238E27FC236}">
-                <a16:creationId xmlns:a16="http://schemas.microsoft.com/office/drawing/2014/main" xmlns="" id="{81308FE1-98CC-9FD0-5CF1-5A8E61C5BA93}"/>
+                <a16:creationId xmlns:a16="http://schemas.microsoft.com/office/drawing/2014/main" id="{81308FE1-98CC-9FD0-5CF1-5A8E61C5BA93}"/>
               </a:ext>
             </a:extLst>
           </p:cNvPr>
@@ -14877,7 +14888,7 @@
           <p:cNvPr id="26" name="Text Placeholder 11">
             <a:extLst>
               <a:ext uri="{FF2B5EF4-FFF2-40B4-BE49-F238E27FC236}">
-                <a16:creationId xmlns:a16="http://schemas.microsoft.com/office/drawing/2014/main" xmlns="" id="{B6FB197B-711E-A949-62E5-216CBC83FFBC}"/>
+                <a16:creationId xmlns:a16="http://schemas.microsoft.com/office/drawing/2014/main" id="{B6FB197B-711E-A949-62E5-216CBC83FFBC}"/>
               </a:ext>
             </a:extLst>
           </p:cNvPr>
@@ -14922,7 +14933,7 @@
           <p:cNvPr id="27" name="Text Placeholder 11">
             <a:extLst>
               <a:ext uri="{FF2B5EF4-FFF2-40B4-BE49-F238E27FC236}">
-                <a16:creationId xmlns:a16="http://schemas.microsoft.com/office/drawing/2014/main" xmlns="" id="{BC5472B4-CBBF-AC70-5BA8-A0661E663D4A}"/>
+                <a16:creationId xmlns:a16="http://schemas.microsoft.com/office/drawing/2014/main" id="{BC5472B4-CBBF-AC70-5BA8-A0661E663D4A}"/>
               </a:ext>
             </a:extLst>
           </p:cNvPr>
@@ -14969,7 +14980,7 @@
           <p:cNvPr id="28" name="Text Placeholder 11">
             <a:extLst>
               <a:ext uri="{FF2B5EF4-FFF2-40B4-BE49-F238E27FC236}">
-                <a16:creationId xmlns:a16="http://schemas.microsoft.com/office/drawing/2014/main" xmlns="" id="{C3CEEBDA-7860-91AD-704A-7A540E1E58F7}"/>
+                <a16:creationId xmlns:a16="http://schemas.microsoft.com/office/drawing/2014/main" id="{C3CEEBDA-7860-91AD-704A-7A540E1E58F7}"/>
               </a:ext>
             </a:extLst>
           </p:cNvPr>
@@ -15014,7 +15025,7 @@
           <p:cNvPr id="30" name="Picture Placeholder 29">
             <a:extLst>
               <a:ext uri="{FF2B5EF4-FFF2-40B4-BE49-F238E27FC236}">
-                <a16:creationId xmlns:a16="http://schemas.microsoft.com/office/drawing/2014/main" xmlns="" id="{DF918527-798D-3B40-E0EA-38C0AEBA6D77}"/>
+                <a16:creationId xmlns:a16="http://schemas.microsoft.com/office/drawing/2014/main" id="{DF918527-798D-3B40-E0EA-38C0AEBA6D77}"/>
               </a:ext>
             </a:extLst>
           </p:cNvPr>
@@ -15057,7 +15068,7 @@
           <p:cNvPr id="31" name="Picture Placeholder 29">
             <a:extLst>
               <a:ext uri="{FF2B5EF4-FFF2-40B4-BE49-F238E27FC236}">
-                <a16:creationId xmlns:a16="http://schemas.microsoft.com/office/drawing/2014/main" xmlns="" id="{B0D40292-F2DF-0641-6B78-370AC5C50094}"/>
+                <a16:creationId xmlns:a16="http://schemas.microsoft.com/office/drawing/2014/main" id="{B0D40292-F2DF-0641-6B78-370AC5C50094}"/>
               </a:ext>
             </a:extLst>
           </p:cNvPr>
@@ -15100,7 +15111,7 @@
           <p:cNvPr id="32" name="Picture Placeholder 29">
             <a:extLst>
               <a:ext uri="{FF2B5EF4-FFF2-40B4-BE49-F238E27FC236}">
-                <a16:creationId xmlns:a16="http://schemas.microsoft.com/office/drawing/2014/main" xmlns="" id="{503DD6AB-C9B3-EBD7-080A-FB219B381225}"/>
+                <a16:creationId xmlns:a16="http://schemas.microsoft.com/office/drawing/2014/main" id="{503DD6AB-C9B3-EBD7-080A-FB219B381225}"/>
               </a:ext>
             </a:extLst>
           </p:cNvPr>
@@ -15143,7 +15154,7 @@
           <p:cNvPr id="33" name="Picture Placeholder 29">
             <a:extLst>
               <a:ext uri="{FF2B5EF4-FFF2-40B4-BE49-F238E27FC236}">
-                <a16:creationId xmlns:a16="http://schemas.microsoft.com/office/drawing/2014/main" xmlns="" id="{E61A9741-3B1C-111D-B260-CF7E7F223F82}"/>
+                <a16:creationId xmlns:a16="http://schemas.microsoft.com/office/drawing/2014/main" id="{E61A9741-3B1C-111D-B260-CF7E7F223F82}"/>
               </a:ext>
             </a:extLst>
           </p:cNvPr>
@@ -15186,7 +15197,7 @@
           <p:cNvPr id="34" name="Picture Placeholder 29">
             <a:extLst>
               <a:ext uri="{FF2B5EF4-FFF2-40B4-BE49-F238E27FC236}">
-                <a16:creationId xmlns:a16="http://schemas.microsoft.com/office/drawing/2014/main" xmlns="" id="{E49C1AE1-BC78-2CE3-D292-61496AC727DE}"/>
+                <a16:creationId xmlns:a16="http://schemas.microsoft.com/office/drawing/2014/main" id="{E49C1AE1-BC78-2CE3-D292-61496AC727DE}"/>
               </a:ext>
             </a:extLst>
           </p:cNvPr>
@@ -15229,7 +15240,7 @@
           <p:cNvPr id="29" name="Text Placeholder 11">
             <a:extLst>
               <a:ext uri="{FF2B5EF4-FFF2-40B4-BE49-F238E27FC236}">
-                <a16:creationId xmlns:a16="http://schemas.microsoft.com/office/drawing/2014/main" xmlns="" id="{3B71C9DC-B9E5-6C34-B451-BA2224CCDDE0}"/>
+                <a16:creationId xmlns:a16="http://schemas.microsoft.com/office/drawing/2014/main" id="{3B71C9DC-B9E5-6C34-B451-BA2224CCDDE0}"/>
               </a:ext>
             </a:extLst>
           </p:cNvPr>
@@ -15284,7 +15295,7 @@
           <p:cNvPr id="36" name="Text Placeholder 11">
             <a:extLst>
               <a:ext uri="{FF2B5EF4-FFF2-40B4-BE49-F238E27FC236}">
-                <a16:creationId xmlns:a16="http://schemas.microsoft.com/office/drawing/2014/main" xmlns="" id="{0596D87F-0114-685D-7F97-873DBA557947}"/>
+                <a16:creationId xmlns:a16="http://schemas.microsoft.com/office/drawing/2014/main" id="{0596D87F-0114-685D-7F97-873DBA557947}"/>
               </a:ext>
             </a:extLst>
           </p:cNvPr>
@@ -15339,7 +15350,7 @@
           <p:cNvPr id="37" name="Text Placeholder 11">
             <a:extLst>
               <a:ext uri="{FF2B5EF4-FFF2-40B4-BE49-F238E27FC236}">
-                <a16:creationId xmlns:a16="http://schemas.microsoft.com/office/drawing/2014/main" xmlns="" id="{5D4E3F00-5755-F2EF-97C8-0FE775CAE04E}"/>
+                <a16:creationId xmlns:a16="http://schemas.microsoft.com/office/drawing/2014/main" id="{5D4E3F00-5755-F2EF-97C8-0FE775CAE04E}"/>
               </a:ext>
             </a:extLst>
           </p:cNvPr>
@@ -15394,7 +15405,7 @@
           <p:cNvPr id="38" name="Text Placeholder 11">
             <a:extLst>
               <a:ext uri="{FF2B5EF4-FFF2-40B4-BE49-F238E27FC236}">
-                <a16:creationId xmlns:a16="http://schemas.microsoft.com/office/drawing/2014/main" xmlns="" id="{29543A01-39BF-D362-26F8-BD1E7D0D3C86}"/>
+                <a16:creationId xmlns:a16="http://schemas.microsoft.com/office/drawing/2014/main" id="{29543A01-39BF-D362-26F8-BD1E7D0D3C86}"/>
               </a:ext>
             </a:extLst>
           </p:cNvPr>
@@ -15449,7 +15460,7 @@
           <p:cNvPr id="39" name="Text Placeholder 11">
             <a:extLst>
               <a:ext uri="{FF2B5EF4-FFF2-40B4-BE49-F238E27FC236}">
-                <a16:creationId xmlns:a16="http://schemas.microsoft.com/office/drawing/2014/main" xmlns="" id="{BB6B72CD-75B9-D90F-4767-2141AEF3B201}"/>
+                <a16:creationId xmlns:a16="http://schemas.microsoft.com/office/drawing/2014/main" id="{BB6B72CD-75B9-D90F-4767-2141AEF3B201}"/>
               </a:ext>
             </a:extLst>
           </p:cNvPr>
@@ -15534,7 +15545,7 @@
           <p:cNvPr id="10" name="Freeform 10">
             <a:extLst>
               <a:ext uri="{FF2B5EF4-FFF2-40B4-BE49-F238E27FC236}">
-                <a16:creationId xmlns:a16="http://schemas.microsoft.com/office/drawing/2014/main" xmlns="" id="{89A27E14-C943-C294-334B-4D6A7500F3B5}"/>
+                <a16:creationId xmlns:a16="http://schemas.microsoft.com/office/drawing/2014/main" id="{89A27E14-C943-C294-334B-4D6A7500F3B5}"/>
               </a:ext>
             </a:extLst>
           </p:cNvPr>
@@ -15682,7 +15693,7 @@
           <p:cNvPr id="11" name="Freeform 11">
             <a:extLst>
               <a:ext uri="{FF2B5EF4-FFF2-40B4-BE49-F238E27FC236}">
-                <a16:creationId xmlns:a16="http://schemas.microsoft.com/office/drawing/2014/main" xmlns="" id="{BE5C5BCA-F960-4024-7215-2D2EFD0FEBF3}"/>
+                <a16:creationId xmlns:a16="http://schemas.microsoft.com/office/drawing/2014/main" id="{BE5C5BCA-F960-4024-7215-2D2EFD0FEBF3}"/>
               </a:ext>
             </a:extLst>
           </p:cNvPr>
@@ -15839,7 +15850,7 @@
           <p:cNvPr id="12" name="Freeform 13">
             <a:extLst>
               <a:ext uri="{FF2B5EF4-FFF2-40B4-BE49-F238E27FC236}">
-                <a16:creationId xmlns:a16="http://schemas.microsoft.com/office/drawing/2014/main" xmlns="" id="{6F62D03F-D065-13FE-5D30-58C2523BD14D}"/>
+                <a16:creationId xmlns:a16="http://schemas.microsoft.com/office/drawing/2014/main" id="{6F62D03F-D065-13FE-5D30-58C2523BD14D}"/>
               </a:ext>
             </a:extLst>
           </p:cNvPr>
@@ -15984,7 +15995,7 @@
           <p:cNvPr id="2" name="Title 1">
             <a:extLst>
               <a:ext uri="{FF2B5EF4-FFF2-40B4-BE49-F238E27FC236}">
-                <a16:creationId xmlns:a16="http://schemas.microsoft.com/office/drawing/2014/main" xmlns="" id="{5A0D1FF5-7EF8-4250-A259-43050ABBD3B6}"/>
+                <a16:creationId xmlns:a16="http://schemas.microsoft.com/office/drawing/2014/main" id="{5A0D1FF5-7EF8-4250-A259-43050ABBD3B6}"/>
               </a:ext>
             </a:extLst>
           </p:cNvPr>
@@ -16021,7 +16032,7 @@
           <p:cNvPr id="3" name="Text Placeholder 2">
             <a:extLst>
               <a:ext uri="{FF2B5EF4-FFF2-40B4-BE49-F238E27FC236}">
-                <a16:creationId xmlns:a16="http://schemas.microsoft.com/office/drawing/2014/main" xmlns="" id="{673DC3A9-D4E6-42CF-91A8-F267C7C66CCB}"/>
+                <a16:creationId xmlns:a16="http://schemas.microsoft.com/office/drawing/2014/main" id="{673DC3A9-D4E6-42CF-91A8-F267C7C66CCB}"/>
               </a:ext>
             </a:extLst>
           </p:cNvPr>
@@ -16094,7 +16105,7 @@
           <p:cNvPr id="4" name="Content Placeholder 3">
             <a:extLst>
               <a:ext uri="{FF2B5EF4-FFF2-40B4-BE49-F238E27FC236}">
-                <a16:creationId xmlns:a16="http://schemas.microsoft.com/office/drawing/2014/main" xmlns="" id="{C752CCA9-53A3-4DA5-AD45-C2A2C12A3A6A}"/>
+                <a16:creationId xmlns:a16="http://schemas.microsoft.com/office/drawing/2014/main" id="{C752CCA9-53A3-4DA5-AD45-C2A2C12A3A6A}"/>
               </a:ext>
             </a:extLst>
           </p:cNvPr>
@@ -16173,7 +16184,7 @@
           <p:cNvPr id="5" name="Text Placeholder 4">
             <a:extLst>
               <a:ext uri="{FF2B5EF4-FFF2-40B4-BE49-F238E27FC236}">
-                <a16:creationId xmlns:a16="http://schemas.microsoft.com/office/drawing/2014/main" xmlns="" id="{2100C9C6-BD61-4D2C-9146-FB785BAE4FF3}"/>
+                <a16:creationId xmlns:a16="http://schemas.microsoft.com/office/drawing/2014/main" id="{2100C9C6-BD61-4D2C-9146-FB785BAE4FF3}"/>
               </a:ext>
             </a:extLst>
           </p:cNvPr>
@@ -16246,7 +16257,7 @@
           <p:cNvPr id="6" name="Content Placeholder 5">
             <a:extLst>
               <a:ext uri="{FF2B5EF4-FFF2-40B4-BE49-F238E27FC236}">
-                <a16:creationId xmlns:a16="http://schemas.microsoft.com/office/drawing/2014/main" xmlns="" id="{E2E342EE-68BB-484D-98C3-48A7847549D4}"/>
+                <a16:creationId xmlns:a16="http://schemas.microsoft.com/office/drawing/2014/main" id="{E2E342EE-68BB-484D-98C3-48A7847549D4}"/>
               </a:ext>
             </a:extLst>
           </p:cNvPr>
@@ -16325,7 +16336,7 @@
           <p:cNvPr id="8" name="Footer Placeholder 7">
             <a:extLst>
               <a:ext uri="{FF2B5EF4-FFF2-40B4-BE49-F238E27FC236}">
-                <a16:creationId xmlns:a16="http://schemas.microsoft.com/office/drawing/2014/main" xmlns="" id="{3A51CCCC-1589-401D-AE98-FC28716301EF}"/>
+                <a16:creationId xmlns:a16="http://schemas.microsoft.com/office/drawing/2014/main" id="{3A51CCCC-1589-401D-AE98-FC28716301EF}"/>
               </a:ext>
             </a:extLst>
           </p:cNvPr>
@@ -16354,7 +16365,7 @@
           <p:cNvPr id="9" name="Slide Number Placeholder 8">
             <a:extLst>
               <a:ext uri="{FF2B5EF4-FFF2-40B4-BE49-F238E27FC236}">
-                <a16:creationId xmlns:a16="http://schemas.microsoft.com/office/drawing/2014/main" xmlns="" id="{285D9D7D-8D9A-473E-AF0D-EF1940D793C3}"/>
+                <a16:creationId xmlns:a16="http://schemas.microsoft.com/office/drawing/2014/main" id="{285D9D7D-8D9A-473E-AF0D-EF1940D793C3}"/>
               </a:ext>
             </a:extLst>
           </p:cNvPr>
@@ -16423,7 +16434,7 @@
           <p:cNvPr id="2" name="Title Placeholder 1">
             <a:extLst>
               <a:ext uri="{FF2B5EF4-FFF2-40B4-BE49-F238E27FC236}">
-                <a16:creationId xmlns:a16="http://schemas.microsoft.com/office/drawing/2014/main" xmlns="" id="{9198F9AA-2C87-421D-97C1-B4248DFDC2C2}"/>
+                <a16:creationId xmlns:a16="http://schemas.microsoft.com/office/drawing/2014/main" id="{9198F9AA-2C87-421D-97C1-B4248DFDC2C2}"/>
               </a:ext>
             </a:extLst>
           </p:cNvPr>
@@ -16462,7 +16473,7 @@
           <p:cNvPr id="3" name="Text Placeholder 2">
             <a:extLst>
               <a:ext uri="{FF2B5EF4-FFF2-40B4-BE49-F238E27FC236}">
-                <a16:creationId xmlns:a16="http://schemas.microsoft.com/office/drawing/2014/main" xmlns="" id="{AE98FC63-C8D2-4CE6-A3F1-EE8ED24590C4}"/>
+                <a16:creationId xmlns:a16="http://schemas.microsoft.com/office/drawing/2014/main" id="{AE98FC63-C8D2-4CE6-A3F1-EE8ED24590C4}"/>
               </a:ext>
             </a:extLst>
           </p:cNvPr>
@@ -16530,7 +16541,7 @@
           <p:cNvPr id="6" name="Slide Number Placeholder 5">
             <a:extLst>
               <a:ext uri="{FF2B5EF4-FFF2-40B4-BE49-F238E27FC236}">
-                <a16:creationId xmlns:a16="http://schemas.microsoft.com/office/drawing/2014/main" xmlns="" id="{CDC57CF0-034F-450D-937C-718D5AF1A059}"/>
+                <a16:creationId xmlns:a16="http://schemas.microsoft.com/office/drawing/2014/main" id="{CDC57CF0-034F-450D-937C-718D5AF1A059}"/>
               </a:ext>
             </a:extLst>
           </p:cNvPr>
@@ -16580,7 +16591,7 @@
           <p:cNvPr id="5" name="Footer Placeholder 4">
             <a:extLst>
               <a:ext uri="{FF2B5EF4-FFF2-40B4-BE49-F238E27FC236}">
-                <a16:creationId xmlns:a16="http://schemas.microsoft.com/office/drawing/2014/main" xmlns="" id="{60567522-C3B6-46EB-A361-BEC2510B00CA}"/>
+                <a16:creationId xmlns:a16="http://schemas.microsoft.com/office/drawing/2014/main" id="{60567522-C3B6-46EB-A361-BEC2510B00CA}"/>
               </a:ext>
             </a:extLst>
           </p:cNvPr>
@@ -16629,7 +16640,7 @@
           <p:cNvPr id="7" name="Straight Connector 6">
             <a:extLst>
               <a:ext uri="{FF2B5EF4-FFF2-40B4-BE49-F238E27FC236}">
-                <a16:creationId xmlns:a16="http://schemas.microsoft.com/office/drawing/2014/main" xmlns="" id="{2BA4A2D6-617E-EEA3-E4EE-5BDB472F6A43}"/>
+                <a16:creationId xmlns:a16="http://schemas.microsoft.com/office/drawing/2014/main" id="{2BA4A2D6-617E-EEA3-E4EE-5BDB472F6A43}"/>
               </a:ext>
             </a:extLst>
           </p:cNvPr>
@@ -16994,7 +17005,7 @@
   </p:txStyles>
   <p:extLst>
     <p:ext uri="{27BBF7A9-308A-43DC-89C8-2F10F3537804}">
-      <p15:sldGuideLst xmlns:p15="http://schemas.microsoft.com/office/powerpoint/2012/main" xmlns="">
+      <p15:sldGuideLst xmlns:p15="http://schemas.microsoft.com/office/powerpoint/2012/main">
         <p15:guide id="1" orient="horz" pos="2160" userDrawn="1">
           <p15:clr>
             <a:srgbClr val="A4A3A4"/>
@@ -17103,7 +17114,7 @@
           <p:cNvPr id="2" name="Title 1">
             <a:extLst>
               <a:ext uri="{FF2B5EF4-FFF2-40B4-BE49-F238E27FC236}">
-                <a16:creationId xmlns:a16="http://schemas.microsoft.com/office/drawing/2014/main" xmlns="" id="{DC870DB4-0446-EF22-E8E0-3A5B83923AC0}"/>
+                <a16:creationId xmlns:a16="http://schemas.microsoft.com/office/drawing/2014/main" id="{DC870DB4-0446-EF22-E8E0-3A5B83923AC0}"/>
               </a:ext>
             </a:extLst>
           </p:cNvPr>
@@ -17116,7 +17127,7 @@
         </p:nvSpPr>
         <p:spPr>
           <a:xfrm>
-            <a:off x="1097460" y="3098258"/>
+            <a:off x="1152592" y="3923832"/>
             <a:ext cx="9921240" cy="758952"/>
           </a:xfrm>
         </p:spPr>
@@ -17126,17 +17137,8 @@
           <a:p>
             <a:r>
               <a:rPr lang="en-US" sz="4000" dirty="0"/>
-              <a:t>AI-Based Student Dropout Prediction &amp; </a:t>
-            </a:r>
-            <a:r>
-              <a:rPr lang="en-US" sz="4000" dirty="0" smtClean="0"/>
-              <a:t>Counseling </a:t>
-            </a:r>
-            <a:r>
-              <a:rPr lang="en-US" sz="4000" dirty="0"/>
-              <a:t>System</a:t>
-            </a:r>
-            <a:endParaRPr lang="en-US" sz="4000" dirty="0"/>
+              <a:t>AI-Based Student Dropout Prediction &amp; Counseling System</a:t>
+            </a:r>
           </a:p>
         </p:txBody>
       </p:sp>
@@ -17145,7 +17147,7 @@
           <p:cNvPr id="3" name="Subtitle 2">
             <a:extLst>
               <a:ext uri="{FF2B5EF4-FFF2-40B4-BE49-F238E27FC236}">
-                <a16:creationId xmlns:a16="http://schemas.microsoft.com/office/drawing/2014/main" xmlns="" id="{696329B1-2D04-0F3A-1081-C5117D8CE122}"/>
+                <a16:creationId xmlns:a16="http://schemas.microsoft.com/office/drawing/2014/main" id="{696329B1-2D04-0F3A-1081-C5117D8CE122}"/>
               </a:ext>
             </a:extLst>
           </p:cNvPr>
@@ -17173,7 +17175,7 @@
           <p:cNvPr id="7" name="TextBox 6">
             <a:extLst>
               <a:ext uri="{FF2B5EF4-FFF2-40B4-BE49-F238E27FC236}">
-                <a16:creationId xmlns:a16="http://schemas.microsoft.com/office/drawing/2014/main" xmlns="" id="{B5DE6866-765C-C697-B1BC-49EEA2358D46}"/>
+                <a16:creationId xmlns:a16="http://schemas.microsoft.com/office/drawing/2014/main" id="{B5DE6866-765C-C697-B1BC-49EEA2358D46}"/>
               </a:ext>
             </a:extLst>
           </p:cNvPr>
@@ -17182,7 +17184,7 @@
         </p:nvSpPr>
         <p:spPr>
           <a:xfrm>
-            <a:off x="304083" y="623281"/>
+            <a:off x="304083" y="1030064"/>
             <a:ext cx="11618259" cy="954107"/>
           </a:xfrm>
           <a:prstGeom prst="rect">
@@ -17218,37 +17220,17 @@
                 <a:latin typeface="Arial" panose="020B0604020202020204" pitchFamily="34" charset="0"/>
                 <a:cs typeface="Arial" panose="020B0604020202020204" pitchFamily="34" charset="0"/>
               </a:rPr>
-              <a:t>Knowledge Park </a:t>
-            </a:r>
-            <a:r>
-              <a:rPr lang="en-US" sz="2000" dirty="0" smtClean="0">
-                <a:solidFill>
-                  <a:schemeClr val="bg1"/>
-                </a:solidFill>
-                <a:latin typeface="Arial" panose="020B0604020202020204" pitchFamily="34" charset="0"/>
-                <a:cs typeface="Arial" panose="020B0604020202020204" pitchFamily="34" charset="0"/>
-              </a:rPr>
-              <a:t>III , Greater </a:t>
-            </a:r>
-            <a:r>
-              <a:rPr lang="en-US" sz="2000" dirty="0">
-                <a:solidFill>
-                  <a:schemeClr val="bg1"/>
-                </a:solidFill>
-                <a:latin typeface="Arial" panose="020B0604020202020204" pitchFamily="34" charset="0"/>
-                <a:cs typeface="Arial" panose="020B0604020202020204" pitchFamily="34" charset="0"/>
-              </a:rPr>
-              <a:t>Noida</a:t>
-            </a:r>
-          </a:p>
-        </p:txBody>
-      </p:sp>
-      <p:sp>
-        <p:nvSpPr>
-          <p:cNvPr id="8" name="TextBox 7">
-            <a:extLst>
-              <a:ext uri="{FF2B5EF4-FFF2-40B4-BE49-F238E27FC236}">
-                <a16:creationId xmlns:a16="http://schemas.microsoft.com/office/drawing/2014/main" xmlns="" id="{3B6D8977-3C24-1C1F-43D1-7D4141D1259D}"/>
+              <a:t>Knowledge Park III , Greater Noida</a:t>
+            </a:r>
+          </a:p>
+        </p:txBody>
+      </p:sp>
+      <p:sp>
+        <p:nvSpPr>
+          <p:cNvPr id="9" name="TextBox 8">
+            <a:extLst>
+              <a:ext uri="{FF2B5EF4-FFF2-40B4-BE49-F238E27FC236}">
+                <a16:creationId xmlns:a16="http://schemas.microsoft.com/office/drawing/2014/main" id="{3703F324-4667-84EC-69C2-84DD3965AADF}"/>
               </a:ext>
             </a:extLst>
           </p:cNvPr>
@@ -17257,205 +17239,7 @@
         </p:nvSpPr>
         <p:spPr>
           <a:xfrm>
-            <a:off x="3667193" y="4419891"/>
-            <a:ext cx="5002305" cy="1200329"/>
-          </a:xfrm>
-          <a:prstGeom prst="rect">
-            <a:avLst/>
-          </a:prstGeom>
-          <a:noFill/>
-        </p:spPr>
-        <p:txBody>
-          <a:bodyPr wrap="square" rtlCol="0">
-            <a:spAutoFit/>
-          </a:bodyPr>
-          <a:lstStyle/>
-          <a:p>
-            <a:pPr algn="ctr"/>
-            <a:r>
-              <a:rPr lang="en-US" dirty="0">
-                <a:solidFill>
-                  <a:schemeClr val="bg1"/>
-                </a:solidFill>
-                <a:latin typeface="Arial" panose="020B0604020202020204" pitchFamily="34" charset="0"/>
-                <a:cs typeface="Arial" panose="020B0604020202020204" pitchFamily="34" charset="0"/>
-              </a:rPr>
-              <a:t>TEAM MEMBERS</a:t>
-            </a:r>
-          </a:p>
-          <a:p>
-            <a:pPr algn="ctr"/>
-            <a:r>
-              <a:rPr lang="en-US" dirty="0" err="1" smtClean="0">
-                <a:solidFill>
-                  <a:schemeClr val="bg1"/>
-                </a:solidFill>
-                <a:latin typeface="Arial" panose="020B0604020202020204" pitchFamily="34" charset="0"/>
-                <a:cs typeface="Arial" panose="020B0604020202020204" pitchFamily="34" charset="0"/>
-              </a:rPr>
-              <a:t>Chandrakant</a:t>
-            </a:r>
-            <a:r>
-              <a:rPr lang="en-US" dirty="0" smtClean="0">
-                <a:solidFill>
-                  <a:schemeClr val="bg1"/>
-                </a:solidFill>
-                <a:latin typeface="Arial" panose="020B0604020202020204" pitchFamily="34" charset="0"/>
-                <a:cs typeface="Arial" panose="020B0604020202020204" pitchFamily="34" charset="0"/>
-              </a:rPr>
-              <a:t> Singh</a:t>
-            </a:r>
-            <a:r>
-              <a:rPr lang="en-US" dirty="0" smtClean="0">
-                <a:solidFill>
-                  <a:schemeClr val="bg1"/>
-                </a:solidFill>
-                <a:latin typeface="Arial" panose="020B0604020202020204" pitchFamily="34" charset="0"/>
-                <a:cs typeface="Arial" panose="020B0604020202020204" pitchFamily="34" charset="0"/>
-              </a:rPr>
-              <a:t> </a:t>
-            </a:r>
-            <a:r>
-              <a:rPr lang="en-US" dirty="0">
-                <a:solidFill>
-                  <a:schemeClr val="bg1"/>
-                </a:solidFill>
-                <a:latin typeface="Arial" panose="020B0604020202020204" pitchFamily="34" charset="0"/>
-                <a:cs typeface="Arial" panose="020B0604020202020204" pitchFamily="34" charset="0"/>
-              </a:rPr>
-              <a:t>(</a:t>
-            </a:r>
-            <a:r>
-              <a:rPr lang="en-US" dirty="0" smtClean="0">
-                <a:solidFill>
-                  <a:schemeClr val="bg1"/>
-                </a:solidFill>
-                <a:latin typeface="Arial" panose="020B0604020202020204" pitchFamily="34" charset="0"/>
-                <a:cs typeface="Arial" panose="020B0604020202020204" pitchFamily="34" charset="0"/>
-              </a:rPr>
-              <a:t>2302161520024)</a:t>
-            </a:r>
-            <a:endParaRPr lang="en-US" dirty="0">
-              <a:solidFill>
-                <a:schemeClr val="bg1"/>
-              </a:solidFill>
-              <a:latin typeface="Arial" panose="020B0604020202020204" pitchFamily="34" charset="0"/>
-              <a:cs typeface="Arial" panose="020B0604020202020204" pitchFamily="34" charset="0"/>
-            </a:endParaRPr>
-          </a:p>
-          <a:p>
-            <a:pPr algn="ctr"/>
-            <a:r>
-              <a:rPr lang="en-US" dirty="0" smtClean="0">
-                <a:solidFill>
-                  <a:schemeClr val="bg1"/>
-                </a:solidFill>
-                <a:latin typeface="Arial" panose="020B0604020202020204" pitchFamily="34" charset="0"/>
-                <a:cs typeface="Arial" panose="020B0604020202020204" pitchFamily="34" charset="0"/>
-              </a:rPr>
-              <a:t>Harsh </a:t>
-            </a:r>
-            <a:r>
-              <a:rPr lang="en-US" dirty="0" err="1" smtClean="0">
-                <a:solidFill>
-                  <a:schemeClr val="bg1"/>
-                </a:solidFill>
-                <a:latin typeface="Arial" panose="020B0604020202020204" pitchFamily="34" charset="0"/>
-                <a:cs typeface="Arial" panose="020B0604020202020204" pitchFamily="34" charset="0"/>
-              </a:rPr>
-              <a:t>Lathwal</a:t>
-            </a:r>
-            <a:r>
-              <a:rPr lang="en-US" dirty="0" smtClean="0">
-                <a:solidFill>
-                  <a:schemeClr val="bg1"/>
-                </a:solidFill>
-                <a:latin typeface="Arial" panose="020B0604020202020204" pitchFamily="34" charset="0"/>
-                <a:cs typeface="Arial" panose="020B0604020202020204" pitchFamily="34" charset="0"/>
-              </a:rPr>
-              <a:t> </a:t>
-            </a:r>
-            <a:r>
-              <a:rPr lang="en-US" dirty="0">
-                <a:solidFill>
-                  <a:schemeClr val="bg1"/>
-                </a:solidFill>
-                <a:latin typeface="Arial" panose="020B0604020202020204" pitchFamily="34" charset="0"/>
-                <a:cs typeface="Arial" panose="020B0604020202020204" pitchFamily="34" charset="0"/>
-              </a:rPr>
-              <a:t>(2302161520036)</a:t>
-            </a:r>
-          </a:p>
-          <a:p>
-            <a:pPr algn="ctr"/>
-            <a:r>
-              <a:rPr lang="en-US" dirty="0" err="1" smtClean="0">
-                <a:solidFill>
-                  <a:schemeClr val="bg1"/>
-                </a:solidFill>
-                <a:latin typeface="Arial" panose="020B0604020202020204" pitchFamily="34" charset="0"/>
-                <a:cs typeface="Arial" panose="020B0604020202020204" pitchFamily="34" charset="0"/>
-              </a:rPr>
-              <a:t>Harshit</a:t>
-            </a:r>
-            <a:r>
-              <a:rPr lang="en-US" dirty="0" smtClean="0">
-                <a:solidFill>
-                  <a:schemeClr val="bg1"/>
-                </a:solidFill>
-                <a:latin typeface="Arial" panose="020B0604020202020204" pitchFamily="34" charset="0"/>
-                <a:cs typeface="Arial" panose="020B0604020202020204" pitchFamily="34" charset="0"/>
-              </a:rPr>
-              <a:t> </a:t>
-            </a:r>
-            <a:r>
-              <a:rPr lang="en-US" dirty="0" err="1" smtClean="0">
-                <a:solidFill>
-                  <a:schemeClr val="bg1"/>
-                </a:solidFill>
-                <a:latin typeface="Arial" panose="020B0604020202020204" pitchFamily="34" charset="0"/>
-                <a:cs typeface="Arial" panose="020B0604020202020204" pitchFamily="34" charset="0"/>
-              </a:rPr>
-              <a:t>Maurya</a:t>
-            </a:r>
-            <a:r>
-              <a:rPr lang="en-US" dirty="0" smtClean="0">
-                <a:solidFill>
-                  <a:schemeClr val="bg1"/>
-                </a:solidFill>
-                <a:latin typeface="Arial" panose="020B0604020202020204" pitchFamily="34" charset="0"/>
-                <a:cs typeface="Arial" panose="020B0604020202020204" pitchFamily="34" charset="0"/>
-              </a:rPr>
-              <a:t>(2302161520042</a:t>
-            </a:r>
-            <a:r>
-              <a:rPr lang="en-US" dirty="0">
-                <a:solidFill>
-                  <a:schemeClr val="bg1"/>
-                </a:solidFill>
-                <a:latin typeface="Arial" panose="020B0604020202020204" pitchFamily="34" charset="0"/>
-                <a:cs typeface="Arial" panose="020B0604020202020204" pitchFamily="34" charset="0"/>
-              </a:rPr>
-              <a:t>)</a:t>
-            </a:r>
-          </a:p>
-        </p:txBody>
-      </p:sp>
-      <p:sp>
-        <p:nvSpPr>
-          <p:cNvPr id="9" name="TextBox 8">
-            <a:extLst>
-              <a:ext uri="{FF2B5EF4-FFF2-40B4-BE49-F238E27FC236}">
-                <a16:creationId xmlns:a16="http://schemas.microsoft.com/office/drawing/2014/main" xmlns="" id="{3703F324-4667-84EC-69C2-84DD3965AADF}"/>
-              </a:ext>
-            </a:extLst>
-          </p:cNvPr>
-          <p:cNvSpPr txBox="1"/>
-          <p:nvPr/>
-        </p:nvSpPr>
-        <p:spPr>
-          <a:xfrm>
-            <a:off x="1097460" y="1703090"/>
+            <a:off x="1097460" y="2175510"/>
             <a:ext cx="10031506" cy="369332"/>
           </a:xfrm>
           <a:prstGeom prst="rect">
@@ -17516,7 +17300,7 @@
           <p:cNvPr id="2" name="Title 1">
             <a:extLst>
               <a:ext uri="{FF2B5EF4-FFF2-40B4-BE49-F238E27FC236}">
-                <a16:creationId xmlns:a16="http://schemas.microsoft.com/office/drawing/2014/main" xmlns="" id="{189E73D4-535B-6DCC-2268-43A5E9E12C45}"/>
+                <a16:creationId xmlns:a16="http://schemas.microsoft.com/office/drawing/2014/main" id="{189E73D4-535B-6DCC-2268-43A5E9E12C45}"/>
               </a:ext>
             </a:extLst>
           </p:cNvPr>
@@ -17552,7 +17336,7 @@
           <p:cNvPr id="6" name="Slide Number Placeholder 5">
             <a:extLst>
               <a:ext uri="{FF2B5EF4-FFF2-40B4-BE49-F238E27FC236}">
-                <a16:creationId xmlns:a16="http://schemas.microsoft.com/office/drawing/2014/main" xmlns="" id="{6459FCA3-0124-0FA6-220B-D72E8F8034C8}"/>
+                <a16:creationId xmlns:a16="http://schemas.microsoft.com/office/drawing/2014/main" id="{6459FCA3-0124-0FA6-220B-D72E8F8034C8}"/>
               </a:ext>
             </a:extLst>
           </p:cNvPr>
@@ -17581,7 +17365,7 @@
           <p:cNvPr id="3" name="Rectangle 13">
             <a:extLst>
               <a:ext uri="{FF2B5EF4-FFF2-40B4-BE49-F238E27FC236}">
-                <a16:creationId xmlns:a16="http://schemas.microsoft.com/office/drawing/2014/main" xmlns="" id="{84A45E9E-19E6-E4C9-8062-255BCCF68528}"/>
+                <a16:creationId xmlns:a16="http://schemas.microsoft.com/office/drawing/2014/main" id="{84A45E9E-19E6-E4C9-8062-255BCCF68528}"/>
               </a:ext>
             </a:extLst>
           </p:cNvPr>
@@ -17658,7 +17442,7 @@
               <a:tabLst/>
             </a:pPr>
             <a:r>
-              <a:rPr kumimoji="0" lang="en-US" altLang="en-US" sz="2400" b="1" i="0" u="none" strike="noStrike" cap="none" normalizeH="0" baseline="0" dirty="0" smtClean="0">
+              <a:rPr kumimoji="0" lang="en-US" altLang="en-US" sz="2400" b="1" i="0" u="none" strike="noStrike" cap="none" normalizeH="0" baseline="0" dirty="0">
                 <a:ln>
                   <a:noFill/>
                 </a:ln>
@@ -17717,7 +17501,7 @@
           <p:cNvPr id="4" name="Rectangle 14">
             <a:extLst>
               <a:ext uri="{FF2B5EF4-FFF2-40B4-BE49-F238E27FC236}">
-                <a16:creationId xmlns:a16="http://schemas.microsoft.com/office/drawing/2014/main" xmlns="" id="{8FC745A0-9F94-57D0-DB21-FFC208A43604}"/>
+                <a16:creationId xmlns:a16="http://schemas.microsoft.com/office/drawing/2014/main" id="{8FC745A0-9F94-57D0-DB21-FFC208A43604}"/>
               </a:ext>
             </a:extLst>
           </p:cNvPr>
@@ -17794,7 +17578,7 @@
               <a:tabLst/>
             </a:pPr>
             <a:r>
-              <a:rPr kumimoji="0" lang="en-US" altLang="en-US" sz="2400" b="1" i="0" u="none" strike="noStrike" cap="none" normalizeH="0" baseline="0" dirty="0" smtClean="0">
+              <a:rPr kumimoji="0" lang="en-US" altLang="en-US" sz="2400" b="1" i="0" u="none" strike="noStrike" cap="none" normalizeH="0" baseline="0" dirty="0">
                 <a:ln>
                   <a:noFill/>
                 </a:ln>
@@ -17853,7 +17637,7 @@
           <p:cNvPr id="12" name="Rectangle 21">
             <a:extLst>
               <a:ext uri="{FF2B5EF4-FFF2-40B4-BE49-F238E27FC236}">
-                <a16:creationId xmlns:a16="http://schemas.microsoft.com/office/drawing/2014/main" xmlns="" id="{D67E4169-CEA7-9000-F118-CDB6098B0D89}"/>
+                <a16:creationId xmlns:a16="http://schemas.microsoft.com/office/drawing/2014/main" id="{D67E4169-CEA7-9000-F118-CDB6098B0D89}"/>
               </a:ext>
             </a:extLst>
           </p:cNvPr>
@@ -17926,7 +17710,7 @@
           <p:cNvPr id="13" name="Rectangle 22">
             <a:extLst>
               <a:ext uri="{FF2B5EF4-FFF2-40B4-BE49-F238E27FC236}">
-                <a16:creationId xmlns:a16="http://schemas.microsoft.com/office/drawing/2014/main" xmlns="" id="{A196A882-FC86-A7F9-2ECE-1995D9CD2703}"/>
+                <a16:creationId xmlns:a16="http://schemas.microsoft.com/office/drawing/2014/main" id="{A196A882-FC86-A7F9-2ECE-1995D9CD2703}"/>
               </a:ext>
             </a:extLst>
           </p:cNvPr>
@@ -17999,7 +17783,7 @@
           <p:cNvPr id="14" name="Rectangle 23">
             <a:extLst>
               <a:ext uri="{FF2B5EF4-FFF2-40B4-BE49-F238E27FC236}">
-                <a16:creationId xmlns:a16="http://schemas.microsoft.com/office/drawing/2014/main" xmlns="" id="{1E93DC45-A09D-8BD6-C7F1-D46B80F4FDD3}"/>
+                <a16:creationId xmlns:a16="http://schemas.microsoft.com/office/drawing/2014/main" id="{1E93DC45-A09D-8BD6-C7F1-D46B80F4FDD3}"/>
               </a:ext>
             </a:extLst>
           </p:cNvPr>
@@ -18072,7 +17856,7 @@
           <p:cNvPr id="15" name="Rectangle 24">
             <a:extLst>
               <a:ext uri="{FF2B5EF4-FFF2-40B4-BE49-F238E27FC236}">
-                <a16:creationId xmlns:a16="http://schemas.microsoft.com/office/drawing/2014/main" xmlns="" id="{4E00ACAE-94C2-36FD-3EB8-089D1588C8E6}"/>
+                <a16:creationId xmlns:a16="http://schemas.microsoft.com/office/drawing/2014/main" id="{4E00ACAE-94C2-36FD-3EB8-089D1588C8E6}"/>
               </a:ext>
             </a:extLst>
           </p:cNvPr>
@@ -18145,7 +17929,7 @@
           <p:cNvPr id="16" name="Rectangle 25">
             <a:extLst>
               <a:ext uri="{FF2B5EF4-FFF2-40B4-BE49-F238E27FC236}">
-                <a16:creationId xmlns:a16="http://schemas.microsoft.com/office/drawing/2014/main" xmlns="" id="{9F98773A-9F8B-A6DE-1FE8-D2147620E961}"/>
+                <a16:creationId xmlns:a16="http://schemas.microsoft.com/office/drawing/2014/main" id="{9F98773A-9F8B-A6DE-1FE8-D2147620E961}"/>
               </a:ext>
             </a:extLst>
           </p:cNvPr>
@@ -18360,7 +18144,7 @@
           <p:cNvPr id="6" name="TextBox 5">
             <a:extLst>
               <a:ext uri="{FF2B5EF4-FFF2-40B4-BE49-F238E27FC236}">
-                <a16:creationId xmlns:a16="http://schemas.microsoft.com/office/drawing/2014/main" xmlns="" id="{3CD43B81-4B16-C7E5-874E-CFC4AF850BEE}"/>
+                <a16:creationId xmlns:a16="http://schemas.microsoft.com/office/drawing/2014/main" id="{3CD43B81-4B16-C7E5-874E-CFC4AF850BEE}"/>
               </a:ext>
             </a:extLst>
           </p:cNvPr>
@@ -18402,7 +18186,7 @@
               </a:tabLst>
             </a:pPr>
             <a:r>
-              <a:rPr lang="en-US" altLang="en-US" sz="2400" b="1" dirty="0" smtClean="0">
+              <a:rPr lang="en-US" altLang="en-US" sz="2400" b="1" dirty="0">
                 <a:solidFill>
                   <a:schemeClr val="bg1"/>
                 </a:solidFill>
@@ -18545,7 +18329,7 @@
           <p:cNvPr id="6" name="TextBox 5">
             <a:extLst>
               <a:ext uri="{FF2B5EF4-FFF2-40B4-BE49-F238E27FC236}">
-                <a16:creationId xmlns:a16="http://schemas.microsoft.com/office/drawing/2014/main" xmlns="" id="{3CD43B81-4B16-C7E5-874E-CFC4AF850BEE}"/>
+                <a16:creationId xmlns:a16="http://schemas.microsoft.com/office/drawing/2014/main" id="{3CD43B81-4B16-C7E5-874E-CFC4AF850BEE}"/>
               </a:ext>
             </a:extLst>
           </p:cNvPr>
@@ -18587,7 +18371,7 @@
               </a:tabLst>
             </a:pPr>
             <a:r>
-              <a:rPr lang="en-US" altLang="en-US" sz="2400" b="1" dirty="0" smtClean="0">
+              <a:rPr lang="en-US" altLang="en-US" sz="2400" b="1" dirty="0">
                 <a:solidFill>
                   <a:schemeClr val="bg1"/>
                 </a:solidFill>
@@ -18730,7 +18514,7 @@
           <p:cNvPr id="6" name="TextBox 5">
             <a:extLst>
               <a:ext uri="{FF2B5EF4-FFF2-40B4-BE49-F238E27FC236}">
-                <a16:creationId xmlns:a16="http://schemas.microsoft.com/office/drawing/2014/main" xmlns="" id="{3CD43B81-4B16-C7E5-874E-CFC4AF850BEE}"/>
+                <a16:creationId xmlns:a16="http://schemas.microsoft.com/office/drawing/2014/main" id="{3CD43B81-4B16-C7E5-874E-CFC4AF850BEE}"/>
               </a:ext>
             </a:extLst>
           </p:cNvPr>
@@ -18754,16 +18538,8 @@
           <a:lstStyle/>
           <a:p>
             <a:r>
-              <a:rPr lang="en-US" sz="2400" b="1" dirty="0" smtClean="0"/>
+              <a:rPr lang="en-US" sz="2400" b="1" dirty="0"/>
               <a:t>  </a:t>
-            </a:r>
-            <a:r>
-              <a:rPr lang="en-US" sz="2400" b="1" u="sng" dirty="0" smtClean="0">
-                <a:solidFill>
-                  <a:schemeClr val="bg1"/>
-                </a:solidFill>
-              </a:rPr>
-              <a:t>Daily </a:t>
             </a:r>
             <a:r>
               <a:rPr lang="en-US" sz="2400" b="1" u="sng" dirty="0">
@@ -18771,23 +18547,7 @@
                   <a:schemeClr val="bg1"/>
                 </a:solidFill>
               </a:rPr>
-              <a:t>Routine </a:t>
-            </a:r>
-            <a:r>
-              <a:rPr lang="en-US" sz="2400" b="1" u="sng" dirty="0" smtClean="0">
-                <a:solidFill>
-                  <a:schemeClr val="bg1"/>
-                </a:solidFill>
-              </a:rPr>
-              <a:t>Tracker                                                             To-Do </a:t>
-            </a:r>
-            <a:r>
-              <a:rPr lang="en-US" sz="2400" b="1" u="sng" dirty="0">
-                <a:solidFill>
-                  <a:schemeClr val="bg1"/>
-                </a:solidFill>
-              </a:rPr>
-              <a:t>List Maker</a:t>
+              <a:t>Daily Routine Tracker                                                             To-Do List Maker</a:t>
             </a:r>
           </a:p>
           <a:p>
@@ -18972,7 +18732,7 @@
           <p:cNvPr id="2" name="Title 1">
             <a:extLst>
               <a:ext uri="{FF2B5EF4-FFF2-40B4-BE49-F238E27FC236}">
-                <a16:creationId xmlns:a16="http://schemas.microsoft.com/office/drawing/2014/main" xmlns="" id="{48C5BC92-868A-26B2-CBC0-C9D94E65F1A4}"/>
+                <a16:creationId xmlns:a16="http://schemas.microsoft.com/office/drawing/2014/main" id="{48C5BC92-868A-26B2-CBC0-C9D94E65F1A4}"/>
               </a:ext>
             </a:extLst>
           </p:cNvPr>
@@ -18994,7 +18754,7 @@
           <a:lstStyle/>
           <a:p>
             <a:r>
-              <a:rPr lang="en-US" dirty="0" smtClean="0">
+              <a:rPr lang="en-US" dirty="0">
                 <a:ln w="28575">
                   <a:noFill/>
                   <a:prstDash val="solid"/>
@@ -19070,23 +18830,7 @@
                   <a:schemeClr val="bg1"/>
                 </a:solidFill>
               </a:rPr>
-              <a:t>• Expand </a:t>
-            </a:r>
-            <a:r>
-              <a:rPr lang="en-US" sz="4000" b="1" dirty="0" smtClean="0">
-                <a:solidFill>
-                  <a:schemeClr val="bg1"/>
-                </a:solidFill>
-              </a:rPr>
-              <a:t>counseling </a:t>
-            </a:r>
-            <a:r>
-              <a:rPr lang="en-US" sz="4000" b="1" dirty="0">
-                <a:solidFill>
-                  <a:schemeClr val="bg1"/>
-                </a:solidFill>
-              </a:rPr>
-              <a:t>to mental health and career planning.</a:t>
+              <a:t>• Expand counseling to mental health and career planning.</a:t>
             </a:r>
           </a:p>
           <a:p>
@@ -19139,7 +18883,7 @@
           <p:cNvPr id="2" name="Title 1">
             <a:extLst>
               <a:ext uri="{FF2B5EF4-FFF2-40B4-BE49-F238E27FC236}">
-                <a16:creationId xmlns:a16="http://schemas.microsoft.com/office/drawing/2014/main" xmlns="" id="{48C5BC92-868A-26B2-CBC0-C9D94E65F1A4}"/>
+                <a16:creationId xmlns:a16="http://schemas.microsoft.com/office/drawing/2014/main" id="{48C5BC92-868A-26B2-CBC0-C9D94E65F1A4}"/>
               </a:ext>
             </a:extLst>
           </p:cNvPr>
@@ -19175,7 +18919,7 @@
           <p:cNvPr id="3" name="Subtitle 2">
             <a:extLst>
               <a:ext uri="{FF2B5EF4-FFF2-40B4-BE49-F238E27FC236}">
-                <a16:creationId xmlns:a16="http://schemas.microsoft.com/office/drawing/2014/main" xmlns="" id="{6F9C1627-7A56-025E-482D-E2AB014EDF92}"/>
+                <a16:creationId xmlns:a16="http://schemas.microsoft.com/office/drawing/2014/main" id="{6F9C1627-7A56-025E-482D-E2AB014EDF92}"/>
               </a:ext>
             </a:extLst>
           </p:cNvPr>
@@ -19323,7 +19067,7 @@
           <p:cNvPr id="2" name="Title 1">
             <a:extLst>
               <a:ext uri="{FF2B5EF4-FFF2-40B4-BE49-F238E27FC236}">
-                <a16:creationId xmlns:a16="http://schemas.microsoft.com/office/drawing/2014/main" xmlns="" id="{2C9E1892-81E6-551C-7B5A-DEA68224520B}"/>
+                <a16:creationId xmlns:a16="http://schemas.microsoft.com/office/drawing/2014/main" id="{2C9E1892-81E6-551C-7B5A-DEA68224520B}"/>
               </a:ext>
             </a:extLst>
           </p:cNvPr>
@@ -19391,7 +19135,7 @@
           <p:cNvPr id="2" name="Title 1">
             <a:extLst>
               <a:ext uri="{FF2B5EF4-FFF2-40B4-BE49-F238E27FC236}">
-                <a16:creationId xmlns:a16="http://schemas.microsoft.com/office/drawing/2014/main" xmlns="" id="{C07F7E09-6A9E-9FCC-7867-895F21ABE716}"/>
+                <a16:creationId xmlns:a16="http://schemas.microsoft.com/office/drawing/2014/main" id="{C07F7E09-6A9E-9FCC-7867-895F21ABE716}"/>
               </a:ext>
             </a:extLst>
           </p:cNvPr>
@@ -19431,7 +19175,7 @@
           <p:cNvPr id="5" name="Slide Number Placeholder 4">
             <a:extLst>
               <a:ext uri="{FF2B5EF4-FFF2-40B4-BE49-F238E27FC236}">
-                <a16:creationId xmlns:a16="http://schemas.microsoft.com/office/drawing/2014/main" xmlns="" id="{9157728F-9EA1-A705-8E4D-B7823E4F4C26}"/>
+                <a16:creationId xmlns:a16="http://schemas.microsoft.com/office/drawing/2014/main" id="{9157728F-9EA1-A705-8E4D-B7823E4F4C26}"/>
               </a:ext>
             </a:extLst>
           </p:cNvPr>
@@ -19461,7 +19205,7 @@
           <p:cNvPr id="3" name="Content Placeholder 2">
             <a:extLst>
               <a:ext uri="{FF2B5EF4-FFF2-40B4-BE49-F238E27FC236}">
-                <a16:creationId xmlns:a16="http://schemas.microsoft.com/office/drawing/2014/main" xmlns="" id="{199158D4-7B61-0A48-E33F-792278D05724}"/>
+                <a16:creationId xmlns:a16="http://schemas.microsoft.com/office/drawing/2014/main" id="{199158D4-7B61-0A48-E33F-792278D05724}"/>
               </a:ext>
             </a:extLst>
           </p:cNvPr>
@@ -19548,17 +19292,7 @@
                 <a:latin typeface="Segoe UI Light" panose="020B0502040204020203" pitchFamily="34" charset="0"/>
                 <a:cs typeface="Segoe UI Light" panose="020B0502040204020203" pitchFamily="34" charset="0"/>
               </a:rPr>
-              <a:t>Planning of </a:t>
-            </a:r>
-            <a:r>
-              <a:rPr lang="en-US" dirty="0" smtClean="0">
-                <a:solidFill>
-                  <a:schemeClr val="bg1"/>
-                </a:solidFill>
-                <a:latin typeface="Segoe UI Light" panose="020B0502040204020203" pitchFamily="34" charset="0"/>
-                <a:cs typeface="Segoe UI Light" panose="020B0502040204020203" pitchFamily="34" charset="0"/>
-              </a:rPr>
-              <a:t>work</a:t>
+              <a:t>Planning of work</a:t>
             </a:r>
           </a:p>
           <a:p>
@@ -19573,7 +19307,7 @@
               <a:buChar char="o"/>
             </a:pPr>
             <a:r>
-              <a:rPr lang="en-US" dirty="0" smtClean="0">
+              <a:rPr lang="en-US" dirty="0">
                 <a:latin typeface="Segoe UI Light" panose="020B0502040204020203" pitchFamily="34" charset="0"/>
                 <a:cs typeface="Segoe UI Light" panose="020B0502040204020203" pitchFamily="34" charset="0"/>
               </a:rPr>
@@ -19606,17 +19340,7 @@
                 <a:latin typeface="Segoe UI Light" panose="020B0502040204020203" pitchFamily="34" charset="0"/>
                 <a:cs typeface="Segoe UI Light" panose="020B0502040204020203" pitchFamily="34" charset="0"/>
               </a:rPr>
-              <a:t>Snapshots of </a:t>
-            </a:r>
-            <a:r>
-              <a:rPr lang="en-US" dirty="0" smtClean="0">
-                <a:solidFill>
-                  <a:schemeClr val="bg1"/>
-                </a:solidFill>
-                <a:latin typeface="Segoe UI Light" panose="020B0502040204020203" pitchFamily="34" charset="0"/>
-                <a:cs typeface="Segoe UI Light" panose="020B0502040204020203" pitchFamily="34" charset="0"/>
-              </a:rPr>
-              <a:t>Work</a:t>
+              <a:t>Snapshots of Work</a:t>
             </a:r>
           </a:p>
           <a:p>
@@ -19631,7 +19355,7 @@
               <a:buChar char="o"/>
             </a:pPr>
             <a:r>
-              <a:rPr lang="en-US" dirty="0" smtClean="0">
+              <a:rPr lang="en-US" dirty="0">
                 <a:latin typeface="Segoe UI Light" panose="020B0502040204020203" pitchFamily="34" charset="0"/>
                 <a:cs typeface="Segoe UI Light" panose="020B0502040204020203" pitchFamily="34" charset="0"/>
               </a:rPr>
@@ -19704,7 +19428,7 @@
           <p:cNvPr id="2" name="Title 1">
             <a:extLst>
               <a:ext uri="{FF2B5EF4-FFF2-40B4-BE49-F238E27FC236}">
-                <a16:creationId xmlns:a16="http://schemas.microsoft.com/office/drawing/2014/main" xmlns="" id="{F41F0E99-07CC-9576-AFD7-C52151AD0EA3}"/>
+                <a16:creationId xmlns:a16="http://schemas.microsoft.com/office/drawing/2014/main" id="{F41F0E99-07CC-9576-AFD7-C52151AD0EA3}"/>
               </a:ext>
             </a:extLst>
           </p:cNvPr>
@@ -19732,7 +19456,7 @@
           <p:cNvPr id="3" name="Subtitle 2">
             <a:extLst>
               <a:ext uri="{FF2B5EF4-FFF2-40B4-BE49-F238E27FC236}">
-                <a16:creationId xmlns:a16="http://schemas.microsoft.com/office/drawing/2014/main" xmlns="" id="{5A82A8B0-333F-633E-3FA7-D38DBFB10971}"/>
+                <a16:creationId xmlns:a16="http://schemas.microsoft.com/office/drawing/2014/main" id="{5A82A8B0-333F-633E-3FA7-D38DBFB10971}"/>
               </a:ext>
             </a:extLst>
           </p:cNvPr>
@@ -19755,15 +19479,7 @@
           <a:p>
             <a:r>
               <a:rPr lang="en-US" dirty="0"/>
-              <a:t>The </a:t>
-            </a:r>
-            <a:r>
-              <a:rPr lang="en-US" dirty="0" smtClean="0"/>
-              <a:t>idea </a:t>
-            </a:r>
-            <a:r>
-              <a:rPr lang="en-US" dirty="0"/>
-              <a:t>of the project is to predict the dropout risk of students using academic, personal, and behavioral factors and provide proper counseling recommendations to reduce their dropout possibility. The system analyzes student performance data and predicts whether the student is at </a:t>
+              <a:t>The idea of the project is to predict the dropout risk of students using academic, personal, and behavioral factors and provide proper counseling recommendations to reduce their dropout possibility. The system analyzes student performance data and predicts whether the student is at </a:t>
             </a:r>
             <a:r>
               <a:rPr lang="en-US" b="1" dirty="0"/>
@@ -19775,15 +19491,7 @@
             </a:r>
             <a:r>
               <a:rPr lang="en-US" b="1" dirty="0"/>
-              <a:t>personalized guidance or </a:t>
-            </a:r>
-            <a:r>
-              <a:rPr lang="en-US" b="1" dirty="0" smtClean="0"/>
-              <a:t>counseling </a:t>
-            </a:r>
-            <a:r>
-              <a:rPr lang="en-US" b="1" dirty="0"/>
-              <a:t>suggestions</a:t>
+              <a:t>personalized guidance or counseling suggestions</a:t>
             </a:r>
             <a:r>
               <a:rPr lang="en-US" dirty="0"/>
@@ -19827,7 +19535,7 @@
           <p:cNvPr id="2" name="Title 1">
             <a:extLst>
               <a:ext uri="{FF2B5EF4-FFF2-40B4-BE49-F238E27FC236}">
-                <a16:creationId xmlns:a16="http://schemas.microsoft.com/office/drawing/2014/main" xmlns="" id="{F41F0E99-07CC-9576-AFD7-C52151AD0EA3}"/>
+                <a16:creationId xmlns:a16="http://schemas.microsoft.com/office/drawing/2014/main" id="{F41F0E99-07CC-9576-AFD7-C52151AD0EA3}"/>
               </a:ext>
             </a:extLst>
           </p:cNvPr>
@@ -19855,7 +19563,7 @@
           <p:cNvPr id="3" name="Subtitle 2">
             <a:extLst>
               <a:ext uri="{FF2B5EF4-FFF2-40B4-BE49-F238E27FC236}">
-                <a16:creationId xmlns:a16="http://schemas.microsoft.com/office/drawing/2014/main" xmlns="" id="{5A82A8B0-333F-633E-3FA7-D38DBFB10971}"/>
+                <a16:creationId xmlns:a16="http://schemas.microsoft.com/office/drawing/2014/main" id="{5A82A8B0-333F-633E-3FA7-D38DBFB10971}"/>
               </a:ext>
             </a:extLst>
           </p:cNvPr>
@@ -19876,7 +19584,7 @@
           <a:bodyPr/>
           <a:lstStyle/>
           <a:p>
-            <a:endParaRPr lang="en-US" b="0" i="0" u="none" strike="noStrike" baseline="0" dirty="0" smtClean="0">
+            <a:endParaRPr lang="en-US" b="0" i="0" u="none" strike="noStrike" baseline="0" dirty="0">
               <a:solidFill>
                 <a:schemeClr val="tx2">
                   <a:lumMod val="60000"/>
@@ -19896,7 +19604,7 @@
           <p:cNvPr id="5" name="TextBox 4">
             <a:extLst>
               <a:ext uri="{FF2B5EF4-FFF2-40B4-BE49-F238E27FC236}">
-                <a16:creationId xmlns:a16="http://schemas.microsoft.com/office/drawing/2014/main" xmlns="" id="{E6C573CE-745C-A66B-F4B0-48FB0D89EC6A}"/>
+                <a16:creationId xmlns:a16="http://schemas.microsoft.com/office/drawing/2014/main" id="{E6C573CE-745C-A66B-F4B0-48FB0D89EC6A}"/>
               </a:ext>
             </a:extLst>
           </p:cNvPr>
@@ -19925,21 +19633,8 @@
                   <a:schemeClr val="bg1"/>
                 </a:solidFill>
               </a:rPr>
-              <a:t>• Predict student dropout risk using academic and </a:t>
-            </a:r>
-            <a:r>
-              <a:rPr lang="en-US" sz="2400" b="1" dirty="0" smtClean="0">
-                <a:solidFill>
-                  <a:schemeClr val="bg1"/>
-                </a:solidFill>
-              </a:rPr>
-              <a:t>         behavioral data.</a:t>
-            </a:r>
-            <a:endParaRPr lang="en-US" sz="2400" b="1" dirty="0">
-              <a:solidFill>
-                <a:schemeClr val="bg1"/>
-              </a:solidFill>
-            </a:endParaRPr>
+              <a:t>• Predict student dropout risk using academic and          behavioral data.</a:t>
+            </a:r>
           </a:p>
           <a:p>
             <a:r>
@@ -19958,23 +19653,7 @@
                   <a:schemeClr val="bg1"/>
                 </a:solidFill>
               </a:rPr>
-              <a:t>• Provide personalized </a:t>
-            </a:r>
-            <a:r>
-              <a:rPr lang="en-US" sz="2400" b="1" dirty="0" smtClean="0">
-                <a:solidFill>
-                  <a:schemeClr val="bg1"/>
-                </a:solidFill>
-              </a:rPr>
-              <a:t>counseling </a:t>
-            </a:r>
-            <a:r>
-              <a:rPr lang="en-US" sz="2400" b="1" dirty="0">
-                <a:solidFill>
-                  <a:schemeClr val="bg1"/>
-                </a:solidFill>
-              </a:rPr>
-              <a:t>recommendations.</a:t>
+              <a:t>• Provide personalized counseling recommendations.</a:t>
             </a:r>
           </a:p>
           <a:p>
@@ -20035,7 +19714,7 @@
           <p:cNvPr id="106" name="Title 105">
             <a:extLst>
               <a:ext uri="{FF2B5EF4-FFF2-40B4-BE49-F238E27FC236}">
-                <a16:creationId xmlns:a16="http://schemas.microsoft.com/office/drawing/2014/main" xmlns="" id="{734F8B63-0C1D-770B-CA9D-EE7ACF817C1F}"/>
+                <a16:creationId xmlns:a16="http://schemas.microsoft.com/office/drawing/2014/main" id="{734F8B63-0C1D-770B-CA9D-EE7ACF817C1F}"/>
               </a:ext>
             </a:extLst>
           </p:cNvPr>
@@ -20063,7 +19742,7 @@
           <p:cNvPr id="139" name="Slide Number Placeholder 138">
             <a:extLst>
               <a:ext uri="{FF2B5EF4-FFF2-40B4-BE49-F238E27FC236}">
-                <a16:creationId xmlns:a16="http://schemas.microsoft.com/office/drawing/2014/main" xmlns="" id="{0C6CCCC3-BCC9-AE9B-C2AE-4D9986B5F8AE}"/>
+                <a16:creationId xmlns:a16="http://schemas.microsoft.com/office/drawing/2014/main" id="{0C6CCCC3-BCC9-AE9B-C2AE-4D9986B5F8AE}"/>
               </a:ext>
             </a:extLst>
           </p:cNvPr>
@@ -20093,7 +19772,7 @@
           <p:cNvPr id="3" name="Text Placeholder 2">
             <a:extLst>
               <a:ext uri="{FF2B5EF4-FFF2-40B4-BE49-F238E27FC236}">
-                <a16:creationId xmlns:a16="http://schemas.microsoft.com/office/drawing/2014/main" xmlns="" id="{0CF4EECB-47E7-26A0-F3A1-ACAE7AEE5741}"/>
+                <a16:creationId xmlns:a16="http://schemas.microsoft.com/office/drawing/2014/main" id="{0CF4EECB-47E7-26A0-F3A1-ACAE7AEE5741}"/>
               </a:ext>
             </a:extLst>
           </p:cNvPr>
@@ -20121,7 +19800,7 @@
           <p:cNvPr id="133" name="Text Placeholder 132">
             <a:extLst>
               <a:ext uri="{FF2B5EF4-FFF2-40B4-BE49-F238E27FC236}">
-                <a16:creationId xmlns:a16="http://schemas.microsoft.com/office/drawing/2014/main" xmlns="" id="{0D7DF893-CDC1-A213-86BF-C9C73F979CC5}"/>
+                <a16:creationId xmlns:a16="http://schemas.microsoft.com/office/drawing/2014/main" id="{0D7DF893-CDC1-A213-86BF-C9C73F979CC5}"/>
               </a:ext>
             </a:extLst>
           </p:cNvPr>
@@ -20146,7 +19825,7 @@
           <p:cNvPr id="5" name="Text Placeholder 4">
             <a:extLst>
               <a:ext uri="{FF2B5EF4-FFF2-40B4-BE49-F238E27FC236}">
-                <a16:creationId xmlns:a16="http://schemas.microsoft.com/office/drawing/2014/main" xmlns="" id="{AC2F0535-53EA-30FB-770D-0C92BEEF3F6D}"/>
+                <a16:creationId xmlns:a16="http://schemas.microsoft.com/office/drawing/2014/main" id="{AC2F0535-53EA-30FB-770D-0C92BEEF3F6D}"/>
               </a:ext>
             </a:extLst>
           </p:cNvPr>
@@ -20175,7 +19854,7 @@
           <p:cNvPr id="134" name="Text Placeholder 133">
             <a:extLst>
               <a:ext uri="{FF2B5EF4-FFF2-40B4-BE49-F238E27FC236}">
-                <a16:creationId xmlns:a16="http://schemas.microsoft.com/office/drawing/2014/main" xmlns="" id="{9CE100CE-4574-F901-234D-B9BEED642B9B}"/>
+                <a16:creationId xmlns:a16="http://schemas.microsoft.com/office/drawing/2014/main" id="{9CE100CE-4574-F901-234D-B9BEED642B9B}"/>
               </a:ext>
             </a:extLst>
           </p:cNvPr>
@@ -20200,7 +19879,7 @@
           <p:cNvPr id="7" name="Text Placeholder 6">
             <a:extLst>
               <a:ext uri="{FF2B5EF4-FFF2-40B4-BE49-F238E27FC236}">
-                <a16:creationId xmlns:a16="http://schemas.microsoft.com/office/drawing/2014/main" xmlns="" id="{31511481-29C6-275B-963E-B5AF2E87ADA2}"/>
+                <a16:creationId xmlns:a16="http://schemas.microsoft.com/office/drawing/2014/main" id="{31511481-29C6-275B-963E-B5AF2E87ADA2}"/>
               </a:ext>
             </a:extLst>
           </p:cNvPr>
@@ -20229,7 +19908,7 @@
           <p:cNvPr id="135" name="Text Placeholder 134">
             <a:extLst>
               <a:ext uri="{FF2B5EF4-FFF2-40B4-BE49-F238E27FC236}">
-                <a16:creationId xmlns:a16="http://schemas.microsoft.com/office/drawing/2014/main" xmlns="" id="{288EBDBE-0ABC-82CE-4598-09F65E315AD7}"/>
+                <a16:creationId xmlns:a16="http://schemas.microsoft.com/office/drawing/2014/main" id="{288EBDBE-0ABC-82CE-4598-09F65E315AD7}"/>
               </a:ext>
             </a:extLst>
           </p:cNvPr>
@@ -20254,7 +19933,7 @@
           <p:cNvPr id="9" name="Text Placeholder 8">
             <a:extLst>
               <a:ext uri="{FF2B5EF4-FFF2-40B4-BE49-F238E27FC236}">
-                <a16:creationId xmlns:a16="http://schemas.microsoft.com/office/drawing/2014/main" xmlns="" id="{2F32973A-CF94-1C2B-BB12-B563173CC79A}"/>
+                <a16:creationId xmlns:a16="http://schemas.microsoft.com/office/drawing/2014/main" id="{2F32973A-CF94-1C2B-BB12-B563173CC79A}"/>
               </a:ext>
             </a:extLst>
           </p:cNvPr>
@@ -20283,7 +19962,7 @@
           <p:cNvPr id="136" name="Text Placeholder 135">
             <a:extLst>
               <a:ext uri="{FF2B5EF4-FFF2-40B4-BE49-F238E27FC236}">
-                <a16:creationId xmlns:a16="http://schemas.microsoft.com/office/drawing/2014/main" xmlns="" id="{14F6CD04-2A18-A6BD-AAB9-1D30D1563399}"/>
+                <a16:creationId xmlns:a16="http://schemas.microsoft.com/office/drawing/2014/main" id="{14F6CD04-2A18-A6BD-AAB9-1D30D1563399}"/>
               </a:ext>
             </a:extLst>
           </p:cNvPr>
@@ -20308,7 +19987,7 @@
           <p:cNvPr id="11" name="Text Placeholder 10">
             <a:extLst>
               <a:ext uri="{FF2B5EF4-FFF2-40B4-BE49-F238E27FC236}">
-                <a16:creationId xmlns:a16="http://schemas.microsoft.com/office/drawing/2014/main" xmlns="" id="{CE7AA813-84F0-DB50-F6B6-A29A94662DAD}"/>
+                <a16:creationId xmlns:a16="http://schemas.microsoft.com/office/drawing/2014/main" id="{CE7AA813-84F0-DB50-F6B6-A29A94662DAD}"/>
               </a:ext>
             </a:extLst>
           </p:cNvPr>
@@ -20337,7 +20016,7 @@
           <p:cNvPr id="137" name="Text Placeholder 136">
             <a:extLst>
               <a:ext uri="{FF2B5EF4-FFF2-40B4-BE49-F238E27FC236}">
-                <a16:creationId xmlns:a16="http://schemas.microsoft.com/office/drawing/2014/main" xmlns="" id="{C171CBDB-4593-F4D1-30E9-A47F4C7CADAF}"/>
+                <a16:creationId xmlns:a16="http://schemas.microsoft.com/office/drawing/2014/main" id="{C171CBDB-4593-F4D1-30E9-A47F4C7CADAF}"/>
               </a:ext>
             </a:extLst>
           </p:cNvPr>
@@ -20362,7 +20041,7 @@
           <p:cNvPr id="69" name="Text Placeholder 68">
             <a:extLst>
               <a:ext uri="{FF2B5EF4-FFF2-40B4-BE49-F238E27FC236}">
-                <a16:creationId xmlns:a16="http://schemas.microsoft.com/office/drawing/2014/main" xmlns="" id="{4BBDF45D-9B32-0154-7602-2C43DAF6C0A6}"/>
+                <a16:creationId xmlns:a16="http://schemas.microsoft.com/office/drawing/2014/main" id="{4BBDF45D-9B32-0154-7602-2C43DAF6C0A6}"/>
               </a:ext>
             </a:extLst>
           </p:cNvPr>
@@ -20392,7 +20071,7 @@
           <p:cNvPr id="70" name="Text Placeholder 69">
             <a:extLst>
               <a:ext uri="{FF2B5EF4-FFF2-40B4-BE49-F238E27FC236}">
-                <a16:creationId xmlns:a16="http://schemas.microsoft.com/office/drawing/2014/main" xmlns="" id="{38FF6C9F-C7C5-37D5-4C61-BA14A636B732}"/>
+                <a16:creationId xmlns:a16="http://schemas.microsoft.com/office/drawing/2014/main" id="{38FF6C9F-C7C5-37D5-4C61-BA14A636B732}"/>
               </a:ext>
             </a:extLst>
           </p:cNvPr>
@@ -20421,7 +20100,7 @@
           <p:cNvPr id="71" name="Text Placeholder 70">
             <a:extLst>
               <a:ext uri="{FF2B5EF4-FFF2-40B4-BE49-F238E27FC236}">
-                <a16:creationId xmlns:a16="http://schemas.microsoft.com/office/drawing/2014/main" xmlns="" id="{5973BD56-1612-983E-EA67-F4039B062085}"/>
+                <a16:creationId xmlns:a16="http://schemas.microsoft.com/office/drawing/2014/main" id="{5973BD56-1612-983E-EA67-F4039B062085}"/>
               </a:ext>
             </a:extLst>
           </p:cNvPr>
@@ -20441,7 +20120,6 @@
               <a:rPr lang="en-US" dirty="0"/>
               <a:t>Data Normalization</a:t>
             </a:r>
-            <a:endParaRPr lang="en-US" dirty="0"/>
           </a:p>
         </p:txBody>
       </p:sp>
@@ -20450,7 +20128,7 @@
           <p:cNvPr id="72" name="Text Placeholder 71">
             <a:extLst>
               <a:ext uri="{FF2B5EF4-FFF2-40B4-BE49-F238E27FC236}">
-                <a16:creationId xmlns:a16="http://schemas.microsoft.com/office/drawing/2014/main" xmlns="" id="{840CFADA-CAD6-2A04-5B15-5DB4DD6A84E0}"/>
+                <a16:creationId xmlns:a16="http://schemas.microsoft.com/office/drawing/2014/main" id="{840CFADA-CAD6-2A04-5B15-5DB4DD6A84E0}"/>
               </a:ext>
             </a:extLst>
           </p:cNvPr>
@@ -20481,7 +20159,7 @@
           <p:cNvPr id="73" name="Text Placeholder 72">
             <a:extLst>
               <a:ext uri="{FF2B5EF4-FFF2-40B4-BE49-F238E27FC236}">
-                <a16:creationId xmlns:a16="http://schemas.microsoft.com/office/drawing/2014/main" xmlns="" id="{DB3347BB-2913-A230-8362-2B778394E7CE}"/>
+                <a16:creationId xmlns:a16="http://schemas.microsoft.com/office/drawing/2014/main" id="{DB3347BB-2913-A230-8362-2B778394E7CE}"/>
               </a:ext>
             </a:extLst>
           </p:cNvPr>
@@ -20561,10 +20239,9 @@
           <a:lstStyle/>
           <a:p>
             <a:r>
-              <a:rPr lang="en-US" dirty="0" smtClean="0"/>
+              <a:rPr lang="en-US" dirty="0"/>
               <a:t>METHODOLOGY</a:t>
             </a:r>
-            <a:endParaRPr lang="en-US" dirty="0"/>
           </a:p>
         </p:txBody>
       </p:sp>
@@ -20879,18 +20556,10 @@
                 <a:latin typeface="Arial" pitchFamily="34" charset="0"/>
                 <a:cs typeface="Arial" pitchFamily="34" charset="0"/>
               </a:rPr>
-              <a:t>• Personalized </a:t>
-            </a:r>
-            <a:r>
-              <a:rPr lang="en-US" sz="4400" dirty="0" smtClean="0">
-                <a:solidFill>
-                  <a:schemeClr val="bg1"/>
-                </a:solidFill>
-                <a:latin typeface="Arial" pitchFamily="34" charset="0"/>
-                <a:cs typeface="Arial" pitchFamily="34" charset="0"/>
-              </a:rPr>
-              <a:t>Counseling </a:t>
-            </a:r>
+              <a:t>• Personalized Counseling Suggestions</a:t>
+            </a:r>
+          </a:p>
+          <a:p>
             <a:r>
               <a:rPr lang="en-US" sz="4400" dirty="0">
                 <a:solidFill>
@@ -20899,39 +20568,7 @@
                 <a:latin typeface="Arial" pitchFamily="34" charset="0"/>
                 <a:cs typeface="Arial" pitchFamily="34" charset="0"/>
               </a:rPr>
-              <a:t>Suggestions</a:t>
-            </a:r>
-          </a:p>
-          <a:p>
-            <a:r>
-              <a:rPr lang="en-US" sz="4400" dirty="0">
-                <a:solidFill>
-                  <a:schemeClr val="bg1"/>
-                </a:solidFill>
-                <a:latin typeface="Arial" pitchFamily="34" charset="0"/>
-                <a:cs typeface="Arial" pitchFamily="34" charset="0"/>
-              </a:rPr>
-              <a:t>• </a:t>
-            </a:r>
-            <a:r>
-              <a:rPr lang="en-US" sz="4400" dirty="0" smtClean="0">
-                <a:solidFill>
-                  <a:schemeClr val="bg1"/>
-                </a:solidFill>
-                <a:latin typeface="Arial" pitchFamily="34" charset="0"/>
-                <a:cs typeface="Arial" pitchFamily="34" charset="0"/>
-              </a:rPr>
-              <a:t>Chat bot </a:t>
-            </a:r>
-            <a:r>
-              <a:rPr lang="en-US" sz="4400" dirty="0">
-                <a:solidFill>
-                  <a:schemeClr val="bg1"/>
-                </a:solidFill>
-                <a:latin typeface="Arial" pitchFamily="34" charset="0"/>
-                <a:cs typeface="Arial" pitchFamily="34" charset="0"/>
-              </a:rPr>
-              <a:t>for quick student support</a:t>
+              <a:t>• Chat bot for quick student support</a:t>
             </a:r>
           </a:p>
           <a:p>
@@ -21007,7 +20644,7 @@
           <p:cNvPr id="7" name="TextBox 6">
             <a:extLst>
               <a:ext uri="{FF2B5EF4-FFF2-40B4-BE49-F238E27FC236}">
-                <a16:creationId xmlns:a16="http://schemas.microsoft.com/office/drawing/2014/main" xmlns="" id="{089B49FD-9CB5-32F2-375E-ED06BA1002CD}"/>
+                <a16:creationId xmlns:a16="http://schemas.microsoft.com/office/drawing/2014/main" id="{089B49FD-9CB5-32F2-375E-ED06BA1002CD}"/>
               </a:ext>
             </a:extLst>
           </p:cNvPr>
@@ -21054,7 +20691,7 @@
               <a:t>Snapshot of </a:t>
             </a:r>
             <a:r>
-              <a:rPr lang="en-US" b="1" dirty="0" smtClean="0">
+              <a:rPr lang="en-US" b="1" dirty="0">
                 <a:solidFill>
                   <a:schemeClr val="bg1"/>
                 </a:solidFill>
@@ -21400,7 +21037,7 @@
   <a:extraClrSchemeLst/>
   <a:extLst>
     <a:ext uri="{05A4C25C-085E-4340-85A3-A5531E510DB2}">
-      <thm15:themeFamily xmlns:thm15="http://schemas.microsoft.com/office/thememl/2012/main" xmlns="" name="Financial-design_Win32_CP_v13" id="{7A406372-3134-432A-A498-73868680C33B}" vid="{88D369DF-875A-4C31-AFF3-DEF6B94343CA}"/>
+      <thm15:themeFamily xmlns:thm15="http://schemas.microsoft.com/office/thememl/2012/main" name="Financial-design_Win32_CP_v13" id="{7A406372-3134-432A-A498-73868680C33B}" vid="{88D369DF-875A-4C31-AFF3-DEF6B94343CA}"/>
     </a:ext>
   </a:extLst>
 </a:theme>
@@ -21695,22 +21332,13 @@
   <a:extraClrSchemeLst/>
   <a:extLst>
     <a:ext uri="{05A4C25C-085E-4340-85A3-A5531E510DB2}">
-      <thm15:themeFamily xmlns:thm15="http://schemas.microsoft.com/office/thememl/2012/main" xmlns="" name="Office Theme" id="{62F939B6-93AF-4DB8-9C6B-D6C7DFDC589F}" vid="{4A3C46E8-61CC-4603-A589-7422A47A8E4A}"/>
+      <thm15:themeFamily xmlns:thm15="http://schemas.microsoft.com/office/thememl/2012/main" name="Office Theme" id="{62F939B6-93AF-4DB8-9C6B-D6C7DFDC589F}" vid="{4A3C46E8-61CC-4603-A589-7422A47A8E4A}"/>
     </a:ext>
   </a:extLst>
 </a:theme>
 </file>
 
 <file path=customXml/item1.xml><?xml version="1.0" encoding="utf-8"?>
-<?mso-contentType ?>
-<FormTemplates xmlns="http://schemas.microsoft.com/sharepoint/v3/contenttype/forms">
-  <Display>DocumentLibraryForm</Display>
-  <Edit>DocumentLibraryForm</Edit>
-  <New>DocumentLibraryForm</New>
-</FormTemplates>
-</file>
-
-<file path=customXml/item2.xml><?xml version="1.0" encoding="utf-8"?>
 <ct:contentTypeSchema xmlns:ct="http://schemas.microsoft.com/office/2006/metadata/contentType" xmlns:ma="http://schemas.microsoft.com/office/2006/metadata/properties/metaAttributes" ct:_="" ma:_="" ma:contentTypeName="Document" ma:contentTypeID="0x01010079F111ED35F8CC479449609E8A0923A6" ma:contentTypeVersion="25" ma:contentTypeDescription="Create a new document." ma:contentTypeScope="" ma:versionID="e02306daf00165b375dc6a58966960be">
   <xsd:schema xmlns:xsd="http://www.w3.org/2001/XMLSchema" xmlns:xs="http://www.w3.org/2001/XMLSchema" xmlns:p="http://schemas.microsoft.com/office/2006/metadata/properties" xmlns:ns1="http://schemas.microsoft.com/sharepoint/v3" xmlns:ns2="71af3243-3dd4-4a8d-8c0d-dd76da1f02a5" xmlns:ns3="16c05727-aa75-4e4a-9b5f-8a80a1165891" xmlns:ns4="230e9df3-be65-4c73-a93b-d1236ebd677e" targetNamespace="http://schemas.microsoft.com/office/2006/metadata/properties" ma:root="true" ma:fieldsID="df88fb76bf5f555224557953949c1ec9" ns1:_="" ns2:_="" ns3:_="" ns4:_="">
     <xsd:import namespace="http://schemas.microsoft.com/sharepoint/v3"/>
@@ -22004,6 +21632,15 @@
 </ct:contentTypeSchema>
 </file>
 
+<file path=customXml/item2.xml><?xml version="1.0" encoding="utf-8"?>
+<?mso-contentType ?>
+<FormTemplates xmlns="http://schemas.microsoft.com/sharepoint/v3/contenttype/forms">
+  <Display>DocumentLibraryForm</Display>
+  <Edit>DocumentLibraryForm</Edit>
+  <New>DocumentLibraryForm</New>
+</FormTemplates>
+</file>
+
 <file path=customXml/item3.xml><?xml version="1.0" encoding="utf-8"?>
 <p:properties xmlns:p="http://schemas.microsoft.com/office/2006/metadata/properties" xmlns:xsi="http://www.w3.org/2001/XMLSchema-instance" xmlns:pc="http://schemas.microsoft.com/office/infopath/2007/PartnerControls">
   <documentManagement>
@@ -22025,14 +21662,6 @@
 </file>
 
 <file path=customXml/itemProps1.xml><?xml version="1.0" encoding="utf-8"?>
-<ds:datastoreItem xmlns:ds="http://schemas.openxmlformats.org/officeDocument/2006/customXml" ds:itemID="{4F1F1912-3146-44AF-A389-9E8B77BB3688}">
-  <ds:schemaRefs>
-    <ds:schemaRef ds:uri="http://schemas.microsoft.com/sharepoint/v3/contenttype/forms"/>
-  </ds:schemaRefs>
-</ds:datastoreItem>
-</file>
-
-<file path=customXml/itemProps2.xml><?xml version="1.0" encoding="utf-8"?>
 <ds:datastoreItem xmlns:ds="http://schemas.openxmlformats.org/officeDocument/2006/customXml" ds:itemID="{176493A3-2B83-4E58-86AD-56A2F2A20F12}">
   <ds:schemaRefs>
     <ds:schemaRef ds:uri="http://schemas.microsoft.com/office/2006/metadata/contentType"/>
@@ -22053,6 +21682,14 @@
 </ds:datastoreItem>
 </file>
 
+<file path=customXml/itemProps2.xml><?xml version="1.0" encoding="utf-8"?>
+<ds:datastoreItem xmlns:ds="http://schemas.openxmlformats.org/officeDocument/2006/customXml" ds:itemID="{4F1F1912-3146-44AF-A389-9E8B77BB3688}">
+  <ds:schemaRefs>
+    <ds:schemaRef ds:uri="http://schemas.microsoft.com/sharepoint/v3/contenttype/forms"/>
+  </ds:schemaRefs>
+</ds:datastoreItem>
+</file>
+
 <file path=customXml/itemProps3.xml><?xml version="1.0" encoding="utf-8"?>
 <ds:datastoreItem xmlns:ds="http://schemas.openxmlformats.org/officeDocument/2006/customXml" ds:itemID="{F8B8ECF1-2A9D-464C-AFE8-2B3295D0BF97}">
   <ds:schemaRefs>
